--- a/Лекции/ООП 1 лек 4.pptx
+++ b/Лекции/ООП 1 лек 4.pptx
@@ -252,7 +252,7 @@
             <a:fld id="{AA2F9473-F066-431E-A6E8-1D478C995A6B}" type="datetimeFigureOut">
               <a:rPr lang="en-US" smtClean="0"/>
               <a:pPr/>
-              <a:t>5/2/2025</a:t>
+              <a:t>4/28/2026</a:t>
             </a:fld>
             <a:endParaRPr lang="en-US"/>
           </a:p>
@@ -5260,9 +5260,9 @@
                 <a:latin typeface="Bookman Old Style" panose="02050604050505020204" pitchFamily="18" charset="0"/>
                 <a:cs typeface="Times New Roman" panose="02020603050405020304" pitchFamily="18" charset="0"/>
               </a:rPr>
-              <a:t>4 </a:t>
-            </a:r>
-            <a:r>
+              <a:t>4 семестр</a:t>
+            </a:r>
+            <a:br>
               <a:rPr lang="ru-RU" sz="2800" b="1" dirty="0" smtClean="0">
                 <a:solidFill>
                   <a:schemeClr val="tx2">
@@ -5272,10 +5272,9 @@
                 <a:latin typeface="Bookman Old Style" panose="02050604050505020204" pitchFamily="18" charset="0"/>
                 <a:cs typeface="Times New Roman" panose="02020603050405020304" pitchFamily="18" charset="0"/>
               </a:rPr>
-              <a:t>семестр</a:t>
-            </a:r>
-            <a:br>
-              <a:rPr lang="ru-RU" sz="2800" b="1" dirty="0" smtClean="0">
+            </a:br>
+            <a:r>
+              <a:rPr lang="ru-RU" sz="2800" b="1" smtClean="0">
                 <a:solidFill>
                   <a:schemeClr val="tx2">
                     <a:lumMod val="50000"/>
@@ -5284,30 +5283,7 @@
                 <a:latin typeface="Bookman Old Style" panose="02050604050505020204" pitchFamily="18" charset="0"/>
                 <a:cs typeface="Times New Roman" panose="02020603050405020304" pitchFamily="18" charset="0"/>
               </a:rPr>
-            </a:br>
-            <a:r>
-              <a:rPr lang="ru-RU" sz="2800" b="1" smtClean="0">
-                <a:solidFill>
-                  <a:schemeClr val="tx2">
-                    <a:lumMod val="50000"/>
-                  </a:schemeClr>
-                </a:solidFill>
-                <a:latin typeface="Bookman Old Style" panose="02050604050505020204" pitchFamily="18" charset="0"/>
-                <a:cs typeface="Times New Roman" panose="02020603050405020304" pitchFamily="18" charset="0"/>
-              </a:rPr>
-              <a:t>Лекция </a:t>
-            </a:r>
-            <a:r>
-              <a:rPr lang="ru-RU" sz="2800" b="1" smtClean="0">
-                <a:solidFill>
-                  <a:schemeClr val="tx2">
-                    <a:lumMod val="50000"/>
-                  </a:schemeClr>
-                </a:solidFill>
-                <a:latin typeface="Bookman Old Style" panose="02050604050505020204" pitchFamily="18" charset="0"/>
-                <a:cs typeface="Times New Roman" panose="02020603050405020304" pitchFamily="18" charset="0"/>
-              </a:rPr>
-              <a:t>4. </a:t>
+              <a:t>Лекция 4. </a:t>
             </a:r>
             <a:r>
               <a:rPr lang="ru-RU" sz="2800" b="1" dirty="0">
@@ -5655,15 +5631,15 @@
         </p:nvSpPr>
         <p:spPr>
           <a:xfrm>
-            <a:off x="280894" y="110496"/>
-            <a:ext cx="11576424" cy="4339650"/>
+            <a:off x="0" y="110496"/>
+            <a:ext cx="12192000" cy="4339650"/>
           </a:xfrm>
           <a:prstGeom prst="rect">
             <a:avLst/>
           </a:prstGeom>
         </p:spPr>
         <p:txBody>
-          <a:bodyPr wrap="square">
+          <a:bodyPr wrap="square" lIns="360000" rIns="360000">
             <a:spAutoFit/>
           </a:bodyPr>
           <a:lstStyle/>
@@ -5982,15 +5958,15 @@
         </p:nvSpPr>
         <p:spPr>
           <a:xfrm>
-            <a:off x="254001" y="0"/>
-            <a:ext cx="11645900" cy="6740307"/>
+            <a:off x="0" y="0"/>
+            <a:ext cx="12192000" cy="6740307"/>
           </a:xfrm>
           <a:prstGeom prst="rect">
             <a:avLst/>
           </a:prstGeom>
         </p:spPr>
         <p:txBody>
-          <a:bodyPr wrap="square">
+          <a:bodyPr wrap="square" lIns="360000" rIns="360000">
             <a:spAutoFit/>
           </a:bodyPr>
           <a:lstStyle/>
@@ -6629,15 +6605,15 @@
         </p:nvSpPr>
         <p:spPr>
           <a:xfrm>
-            <a:off x="340659" y="0"/>
-            <a:ext cx="11766674" cy="6924973"/>
+            <a:off x="0" y="0"/>
+            <a:ext cx="12192000" cy="6924973"/>
           </a:xfrm>
           <a:prstGeom prst="rect">
             <a:avLst/>
           </a:prstGeom>
         </p:spPr>
         <p:txBody>
-          <a:bodyPr wrap="square">
+          <a:bodyPr wrap="square" lIns="360000" rIns="360000">
             <a:spAutoFit/>
           </a:bodyPr>
           <a:lstStyle/>
@@ -7358,7 +7334,7 @@
         <p:spPr>
           <a:xfrm>
             <a:off x="8558306" y="381000"/>
-            <a:ext cx="3633694" cy="4281562"/>
+            <a:ext cx="3330491" cy="3924300"/>
           </a:xfrm>
           <a:prstGeom prst="rect">
             <a:avLst/>
@@ -7410,15 +7386,15 @@
         </p:nvSpPr>
         <p:spPr>
           <a:xfrm>
-            <a:off x="254000" y="0"/>
-            <a:ext cx="11734800" cy="6740307"/>
+            <a:off x="0" y="0"/>
+            <a:ext cx="12192000" cy="6740307"/>
           </a:xfrm>
           <a:prstGeom prst="rect">
             <a:avLst/>
           </a:prstGeom>
         </p:spPr>
         <p:txBody>
-          <a:bodyPr wrap="square">
+          <a:bodyPr wrap="square" lIns="360000" rIns="360000">
             <a:spAutoFit/>
           </a:bodyPr>
           <a:lstStyle/>
@@ -8171,15 +8147,15 @@
         </p:nvSpPr>
         <p:spPr>
           <a:xfrm>
-            <a:off x="262964" y="654356"/>
-            <a:ext cx="11929035" cy="6370975"/>
+            <a:off x="0" y="654356"/>
+            <a:ext cx="12191999" cy="6370975"/>
           </a:xfrm>
           <a:prstGeom prst="rect">
             <a:avLst/>
           </a:prstGeom>
         </p:spPr>
         <p:txBody>
-          <a:bodyPr wrap="square">
+          <a:bodyPr wrap="square" lIns="360000" rIns="360000">
             <a:spAutoFit/>
           </a:bodyPr>
           <a:lstStyle/>
@@ -8875,15 +8851,15 @@
         </p:nvSpPr>
         <p:spPr>
           <a:xfrm>
-            <a:off x="316753" y="0"/>
-            <a:ext cx="11790580" cy="6740307"/>
+            <a:off x="0" y="0"/>
+            <a:ext cx="12192000" cy="6740307"/>
           </a:xfrm>
           <a:prstGeom prst="rect">
             <a:avLst/>
           </a:prstGeom>
         </p:spPr>
         <p:txBody>
-          <a:bodyPr wrap="square">
+          <a:bodyPr wrap="square" lIns="360000" rIns="360000">
             <a:spAutoFit/>
           </a:bodyPr>
           <a:lstStyle/>
@@ -9429,15 +9405,15 @@
         </p:nvSpPr>
         <p:spPr>
           <a:xfrm>
-            <a:off x="394447" y="117693"/>
-            <a:ext cx="11712886" cy="4893647"/>
+            <a:off x="0" y="117693"/>
+            <a:ext cx="12192000" cy="4893647"/>
           </a:xfrm>
           <a:prstGeom prst="rect">
             <a:avLst/>
           </a:prstGeom>
         </p:spPr>
         <p:txBody>
-          <a:bodyPr wrap="square">
+          <a:bodyPr wrap="square" lIns="360000" rIns="360000">
             <a:spAutoFit/>
           </a:bodyPr>
           <a:lstStyle/>
@@ -9892,15 +9868,15 @@
         </p:nvSpPr>
         <p:spPr>
           <a:xfrm>
-            <a:off x="406400" y="117693"/>
-            <a:ext cx="11700933" cy="6001643"/>
+            <a:off x="0" y="117693"/>
+            <a:ext cx="12192000" cy="6001643"/>
           </a:xfrm>
           <a:prstGeom prst="rect">
             <a:avLst/>
           </a:prstGeom>
         </p:spPr>
         <p:txBody>
-          <a:bodyPr wrap="square">
+          <a:bodyPr wrap="square" lIns="360000" rIns="360000">
             <a:spAutoFit/>
           </a:bodyPr>
           <a:lstStyle/>
@@ -10508,15 +10484,15 @@
         </p:nvSpPr>
         <p:spPr>
           <a:xfrm>
-            <a:off x="228600" y="0"/>
-            <a:ext cx="11734800" cy="5632311"/>
+            <a:off x="0" y="0"/>
+            <a:ext cx="12192000" cy="5632311"/>
           </a:xfrm>
           <a:prstGeom prst="rect">
             <a:avLst/>
           </a:prstGeom>
         </p:spPr>
         <p:txBody>
-          <a:bodyPr wrap="square">
+          <a:bodyPr wrap="square" lIns="360000" rIns="360000">
             <a:spAutoFit/>
           </a:bodyPr>
           <a:lstStyle/>
@@ -10755,15 +10731,15 @@
         </p:nvSpPr>
         <p:spPr>
           <a:xfrm>
-            <a:off x="234576" y="97865"/>
-            <a:ext cx="11734800" cy="6555641"/>
+            <a:off x="0" y="97865"/>
+            <a:ext cx="12192000" cy="6555641"/>
           </a:xfrm>
           <a:prstGeom prst="rect">
             <a:avLst/>
           </a:prstGeom>
         </p:spPr>
         <p:txBody>
-          <a:bodyPr wrap="square">
+          <a:bodyPr wrap="square" lIns="360000" rIns="360000">
             <a:spAutoFit/>
           </a:bodyPr>
           <a:lstStyle/>
@@ -11359,28 +11335,28 @@
       </p:sp>
       <p:sp>
         <p:nvSpPr>
-          <p:cNvPr id="7" name="Прямоугольник 6"/>
+          <p:cNvPr id="4" name="Прямоугольник 3"/>
           <p:cNvSpPr/>
           <p:nvPr/>
         </p:nvSpPr>
         <p:spPr>
           <a:xfrm>
-            <a:off x="228600" y="654355"/>
-            <a:ext cx="11677650" cy="6186309"/>
+            <a:off x="0" y="654356"/>
+            <a:ext cx="12192000" cy="6243697"/>
           </a:xfrm>
           <a:prstGeom prst="rect">
             <a:avLst/>
           </a:prstGeom>
         </p:spPr>
         <p:txBody>
-          <a:bodyPr wrap="square">
+          <a:bodyPr wrap="square" lIns="360000" rIns="360000">
             <a:spAutoFit/>
           </a:bodyPr>
           <a:lstStyle/>
           <a:p>
             <a:pPr algn="just">
               <a:lnSpc>
-                <a:spcPct val="150000"/>
+                <a:spcPct val="140000"/>
               </a:lnSpc>
             </a:pPr>
             <a:r>
@@ -11405,7 +11381,7 @@
           <a:p>
             <a:pPr algn="just">
               <a:lnSpc>
-                <a:spcPct val="150000"/>
+                <a:spcPct val="140000"/>
               </a:lnSpc>
             </a:pPr>
             <a:r>
@@ -11415,7 +11391,7 @@
               <a:t>При помощи </a:t>
             </a:r>
             <a:r>
-              <a:rPr lang="ru-RU" sz="2400" dirty="0" err="1" smtClean="0">
+              <a:rPr lang="ru-RU" sz="2400" b="1" dirty="0" err="1" smtClean="0">
                 <a:latin typeface="Bookman Old Style" panose="02050604050505020204" pitchFamily="18" charset="0"/>
               </a:rPr>
               <a:t>многопоточности</a:t>
@@ -11433,20 +11409,26 @@
           <a:p>
             <a:pPr algn="just">
               <a:lnSpc>
-                <a:spcPct val="150000"/>
+                <a:spcPct val="140000"/>
               </a:lnSpc>
             </a:pPr>
             <a:r>
-              <a:rPr lang="ru-RU" sz="2400" b="1" dirty="0" smtClean="0">
-                <a:latin typeface="Bookman Old Style" panose="02050604050505020204" pitchFamily="18" charset="0"/>
-              </a:rPr>
-              <a:t>Например</a:t>
+              <a:rPr lang="ru-RU" sz="2400" b="1" dirty="0">
+                <a:latin typeface="Bookman Old Style" panose="02050604050505020204" pitchFamily="18" charset="0"/>
+              </a:rPr>
+              <a:t>Процесс</a:t>
+            </a:r>
+            <a:r>
+              <a:rPr lang="ru-RU" sz="2400" dirty="0">
+                <a:latin typeface="Bookman Old Style" panose="02050604050505020204" pitchFamily="18" charset="0"/>
+              </a:rPr>
+              <a:t> — это совокупность набора исполняемых инструкций (кода), текущего состояния выполнения (контекста) и выделенных системных ресурсов (адресного пространства, дескрипторов файлов и др</a:t>
             </a:r>
             <a:r>
               <a:rPr lang="ru-RU" sz="2400" dirty="0" smtClean="0">
                 <a:latin typeface="Bookman Old Style" panose="02050604050505020204" pitchFamily="18" charset="0"/>
               </a:rPr>
-              <a:t>, обработку данных и отображение результатов можно выделить в разные потоки, чтобы на время расчета программа не «зависала».</a:t>
+              <a:t>.).</a:t>
             </a:r>
             <a:endParaRPr lang="en-US" sz="2400" dirty="0" smtClean="0">
               <a:latin typeface="Bookman Old Style" panose="02050604050505020204" pitchFamily="18" charset="0"/>
@@ -11455,17 +11437,17 @@
           <a:p>
             <a:pPr algn="just">
               <a:lnSpc>
-                <a:spcPct val="150000"/>
+                <a:spcPct val="140000"/>
               </a:lnSpc>
             </a:pPr>
             <a:r>
-              <a:rPr lang="ru-RU" sz="2400" dirty="0" err="1">
+              <a:rPr lang="ru-RU" sz="2400" dirty="0" err="1" smtClean="0">
                 <a:latin typeface="Bookman Old Style" panose="02050604050505020204" pitchFamily="18" charset="0"/>
               </a:rPr>
               <a:t>Многопоточность</a:t>
             </a:r>
             <a:r>
-              <a:rPr lang="ru-RU" sz="2400" dirty="0">
+              <a:rPr lang="ru-RU" sz="2400" dirty="0" smtClean="0">
                 <a:latin typeface="Bookman Old Style" panose="02050604050505020204" pitchFamily="18" charset="0"/>
               </a:rPr>
               <a:t> может быть реализована 3 способами:</a:t>
@@ -11474,22 +11456,25 @@
           <a:p>
             <a:pPr marL="457200" indent="-457200" algn="just">
               <a:lnSpc>
-                <a:spcPct val="150000"/>
+                <a:spcPct val="140000"/>
               </a:lnSpc>
               <a:buFont typeface="+mj-lt"/>
               <a:buAutoNum type="arabicPeriod"/>
             </a:pPr>
             <a:r>
-              <a:rPr lang="en-US" sz="2400" dirty="0">
+              <a:rPr lang="en-US" sz="2400" dirty="0" smtClean="0">
                 <a:latin typeface="Bookman Old Style" panose="02050604050505020204" pitchFamily="18" charset="0"/>
               </a:rPr>
               <a:t>Thread</a:t>
             </a:r>
+            <a:endParaRPr lang="en-US" sz="2400" dirty="0">
+              <a:latin typeface="Bookman Old Style" panose="02050604050505020204" pitchFamily="18" charset="0"/>
+            </a:endParaRPr>
           </a:p>
           <a:p>
             <a:pPr marL="457200" indent="-457200" algn="just">
               <a:lnSpc>
-                <a:spcPct val="150000"/>
+                <a:spcPct val="140000"/>
               </a:lnSpc>
               <a:buFont typeface="+mj-lt"/>
               <a:buAutoNum type="arabicPeriod"/>
@@ -11507,7 +11492,7 @@
           <a:p>
             <a:pPr marL="457200" indent="-457200" algn="just">
               <a:lnSpc>
-                <a:spcPct val="150000"/>
+                <a:spcPct val="140000"/>
               </a:lnSpc>
               <a:buFont typeface="+mj-lt"/>
               <a:buAutoNum type="arabicPeriod"/>
@@ -11569,15 +11554,15 @@
         </p:nvSpPr>
         <p:spPr>
           <a:xfrm>
-            <a:off x="457200" y="531464"/>
-            <a:ext cx="11734800" cy="5447645"/>
+            <a:off x="0" y="531464"/>
+            <a:ext cx="12192000" cy="5447645"/>
           </a:xfrm>
           <a:prstGeom prst="rect">
             <a:avLst/>
           </a:prstGeom>
         </p:spPr>
         <p:txBody>
-          <a:bodyPr wrap="square">
+          <a:bodyPr wrap="square" lIns="360000" rIns="360000">
             <a:spAutoFit/>
           </a:bodyPr>
           <a:lstStyle/>
@@ -12257,15 +12242,15 @@
         </p:nvSpPr>
         <p:spPr>
           <a:xfrm>
-            <a:off x="328706" y="654356"/>
-            <a:ext cx="11534588" cy="6186309"/>
+            <a:off x="0" y="654356"/>
+            <a:ext cx="12192000" cy="6186309"/>
           </a:xfrm>
           <a:prstGeom prst="rect">
             <a:avLst/>
           </a:prstGeom>
         </p:spPr>
         <p:txBody>
-          <a:bodyPr wrap="square">
+          <a:bodyPr wrap="square" lIns="360000" rIns="360000">
             <a:spAutoFit/>
           </a:bodyPr>
           <a:lstStyle/>
@@ -12535,15 +12520,15 @@
         </p:nvSpPr>
         <p:spPr>
           <a:xfrm>
-            <a:off x="304801" y="0"/>
-            <a:ext cx="11518900" cy="6740307"/>
+            <a:off x="0" y="0"/>
+            <a:ext cx="12192000" cy="6740307"/>
           </a:xfrm>
           <a:prstGeom prst="rect">
             <a:avLst/>
           </a:prstGeom>
         </p:spPr>
         <p:txBody>
-          <a:bodyPr wrap="square">
+          <a:bodyPr wrap="square" lIns="360000" rIns="360000">
             <a:spAutoFit/>
           </a:bodyPr>
           <a:lstStyle/>
@@ -13314,15 +13299,15 @@
         </p:nvSpPr>
         <p:spPr>
           <a:xfrm>
-            <a:off x="247650" y="0"/>
-            <a:ext cx="11696700" cy="6924973"/>
+            <a:off x="0" y="0"/>
+            <a:ext cx="12192000" cy="6924973"/>
           </a:xfrm>
           <a:prstGeom prst="rect">
             <a:avLst/>
           </a:prstGeom>
         </p:spPr>
         <p:txBody>
-          <a:bodyPr wrap="square">
+          <a:bodyPr wrap="square" lIns="360000" rIns="360000">
             <a:spAutoFit/>
           </a:bodyPr>
           <a:lstStyle/>
@@ -13848,15 +13833,15 @@
         </p:nvSpPr>
         <p:spPr>
           <a:xfrm>
-            <a:off x="247650" y="127000"/>
-            <a:ext cx="11601450" cy="6555641"/>
+            <a:off x="0" y="127000"/>
+            <a:ext cx="12192000" cy="6555641"/>
           </a:xfrm>
           <a:prstGeom prst="rect">
             <a:avLst/>
           </a:prstGeom>
         </p:spPr>
         <p:txBody>
-          <a:bodyPr wrap="square">
+          <a:bodyPr wrap="square" lIns="360000" rIns="360000">
             <a:spAutoFit/>
           </a:bodyPr>
           <a:lstStyle/>
@@ -14609,15 +14594,15 @@
         </p:nvSpPr>
         <p:spPr>
           <a:xfrm>
-            <a:off x="241301" y="0"/>
-            <a:ext cx="11658600" cy="6924973"/>
+            <a:off x="0" y="0"/>
+            <a:ext cx="12192000" cy="6924973"/>
           </a:xfrm>
           <a:prstGeom prst="rect">
             <a:avLst/>
           </a:prstGeom>
         </p:spPr>
         <p:txBody>
-          <a:bodyPr wrap="square">
+          <a:bodyPr wrap="square" lIns="360000" rIns="360000">
             <a:spAutoFit/>
           </a:bodyPr>
           <a:lstStyle/>
@@ -15339,21 +15324,21 @@
         </p:nvSpPr>
         <p:spPr>
           <a:xfrm>
-            <a:off x="71718" y="0"/>
-            <a:ext cx="12279406" cy="7109639"/>
+            <a:off x="0" y="0"/>
+            <a:ext cx="12192000" cy="6378669"/>
           </a:xfrm>
           <a:prstGeom prst="rect">
             <a:avLst/>
           </a:prstGeom>
         </p:spPr>
         <p:txBody>
-          <a:bodyPr wrap="square">
+          <a:bodyPr wrap="square" lIns="360000" rIns="360000">
             <a:spAutoFit/>
           </a:bodyPr>
           <a:lstStyle/>
           <a:p>
             <a:r>
-              <a:rPr lang="en-US" sz="2400" dirty="0">
+              <a:rPr lang="en-US" sz="2150" dirty="0">
                 <a:solidFill>
                   <a:srgbClr val="0000FF"/>
                 </a:solidFill>
@@ -15362,7 +15347,7 @@
               <a:t>double</a:t>
             </a:r>
             <a:r>
-              <a:rPr lang="en-US" sz="2400" dirty="0">
+              <a:rPr lang="en-US" sz="2150" dirty="0">
                 <a:solidFill>
                   <a:srgbClr val="000000"/>
                 </a:solidFill>
@@ -15371,7 +15356,7 @@
               <a:t> </a:t>
             </a:r>
             <a:r>
-              <a:rPr lang="en-US" sz="2400" dirty="0" err="1">
+              <a:rPr lang="en-US" sz="2150" dirty="0" err="1">
                 <a:solidFill>
                   <a:srgbClr val="000000"/>
                 </a:solidFill>
@@ -15380,7 +15365,7 @@
               <a:t>CalculatePiMultithread</a:t>
             </a:r>
             <a:r>
-              <a:rPr lang="en-US" sz="2400" dirty="0">
+              <a:rPr lang="en-US" sz="2150" dirty="0">
                 <a:solidFill>
                   <a:srgbClr val="000000"/>
                 </a:solidFill>
@@ -15389,7 +15374,7 @@
               <a:t>(</a:t>
             </a:r>
             <a:r>
-              <a:rPr lang="en-US" sz="2400" dirty="0">
+              <a:rPr lang="en-US" sz="2150" dirty="0">
                 <a:solidFill>
                   <a:srgbClr val="0000FF"/>
                 </a:solidFill>
@@ -15398,7 +15383,7 @@
               <a:t>long</a:t>
             </a:r>
             <a:r>
-              <a:rPr lang="en-US" sz="2400" dirty="0">
+              <a:rPr lang="en-US" sz="2150" dirty="0">
                 <a:solidFill>
                   <a:srgbClr val="000000"/>
                 </a:solidFill>
@@ -15409,7 +15394,7 @@
           </a:p>
           <a:p>
             <a:r>
-              <a:rPr lang="ru-RU" sz="2400" dirty="0">
+              <a:rPr lang="ru-RU" sz="2150" dirty="0">
                 <a:solidFill>
                   <a:srgbClr val="000000"/>
                 </a:solidFill>
@@ -15420,7 +15405,7 @@
           </a:p>
           <a:p>
             <a:r>
-              <a:rPr lang="en-US" sz="2400" dirty="0">
+              <a:rPr lang="en-US" sz="2150" dirty="0">
                 <a:solidFill>
                   <a:srgbClr val="000000"/>
                 </a:solidFill>
@@ -15429,7 +15414,7 @@
               <a:t>    </a:t>
             </a:r>
             <a:r>
-              <a:rPr lang="en-US" sz="2400" dirty="0" err="1">
+              <a:rPr lang="en-US" sz="2150" dirty="0" err="1">
                 <a:solidFill>
                   <a:srgbClr val="0000FF"/>
                 </a:solidFill>
@@ -15438,7 +15423,7 @@
               <a:t>var</a:t>
             </a:r>
             <a:r>
-              <a:rPr lang="en-US" sz="2400" dirty="0">
+              <a:rPr lang="en-US" sz="2150" dirty="0">
                 <a:solidFill>
                   <a:srgbClr val="000000"/>
                 </a:solidFill>
@@ -15449,7 +15434,7 @@
           </a:p>
           <a:p>
             <a:r>
-              <a:rPr lang="en-US" sz="2400" dirty="0">
+              <a:rPr lang="en-US" sz="2150" dirty="0">
                 <a:solidFill>
                   <a:srgbClr val="000000"/>
                 </a:solidFill>
@@ -15458,7 +15443,7 @@
               <a:t>    </a:t>
             </a:r>
             <a:r>
-              <a:rPr lang="en-US" sz="2400" dirty="0" err="1">
+              <a:rPr lang="en-US" sz="2150" dirty="0" err="1">
                 <a:solidFill>
                   <a:srgbClr val="0000FF"/>
                 </a:solidFill>
@@ -15467,7 +15452,7 @@
               <a:t>var</a:t>
             </a:r>
             <a:r>
-              <a:rPr lang="en-US" sz="2400" dirty="0">
+              <a:rPr lang="en-US" sz="2150" dirty="0">
                 <a:solidFill>
                   <a:srgbClr val="000000"/>
                 </a:solidFill>
@@ -15476,7 +15461,7 @@
               <a:t> </a:t>
             </a:r>
             <a:r>
-              <a:rPr lang="en-US" sz="2400" dirty="0" err="1">
+              <a:rPr lang="en-US" sz="2150" dirty="0" err="1">
                 <a:solidFill>
                   <a:srgbClr val="000000"/>
                 </a:solidFill>
@@ -15485,7 +15470,7 @@
               <a:t>threadsCount</a:t>
             </a:r>
             <a:r>
-              <a:rPr lang="en-US" sz="2400" dirty="0">
+              <a:rPr lang="en-US" sz="2150" dirty="0">
                 <a:solidFill>
                   <a:srgbClr val="000000"/>
                 </a:solidFill>
@@ -15494,7 +15479,7 @@
               <a:t> = </a:t>
             </a:r>
             <a:r>
-              <a:rPr lang="en-US" sz="2400" dirty="0" err="1">
+              <a:rPr lang="en-US" sz="2150" dirty="0" err="1">
                 <a:solidFill>
                   <a:srgbClr val="000000"/>
                 </a:solidFill>
@@ -15503,7 +15488,7 @@
               <a:t>Environment.ProcessorCount</a:t>
             </a:r>
             <a:r>
-              <a:rPr lang="en-US" sz="2400" dirty="0">
+              <a:rPr lang="en-US" sz="2150" dirty="0">
                 <a:solidFill>
                   <a:srgbClr val="000000"/>
                 </a:solidFill>
@@ -15514,7 +15499,7 @@
           </a:p>
           <a:p>
             <a:r>
-              <a:rPr lang="en-US" sz="2400" dirty="0">
+              <a:rPr lang="en-US" sz="2150" dirty="0">
                 <a:solidFill>
                   <a:srgbClr val="000000"/>
                 </a:solidFill>
@@ -15523,7 +15508,7 @@
               <a:t>    </a:t>
             </a:r>
             <a:r>
-              <a:rPr lang="en-US" sz="2400" dirty="0" err="1">
+              <a:rPr lang="en-US" sz="2150" dirty="0" err="1">
                 <a:solidFill>
                   <a:srgbClr val="0000FF"/>
                 </a:solidFill>
@@ -15532,7 +15517,7 @@
               <a:t>var</a:t>
             </a:r>
             <a:r>
-              <a:rPr lang="en-US" sz="2400" dirty="0">
+              <a:rPr lang="en-US" sz="2150" dirty="0">
                 <a:solidFill>
                   <a:srgbClr val="000000"/>
                 </a:solidFill>
@@ -15541,7 +15526,7 @@
               <a:t> threads = </a:t>
             </a:r>
             <a:r>
-              <a:rPr lang="en-US" sz="2400" dirty="0">
+              <a:rPr lang="en-US" sz="2150" dirty="0">
                 <a:solidFill>
                   <a:srgbClr val="0000FF"/>
                 </a:solidFill>
@@ -15550,7 +15535,7 @@
               <a:t>new</a:t>
             </a:r>
             <a:r>
-              <a:rPr lang="en-US" sz="2400" dirty="0">
+              <a:rPr lang="en-US" sz="2150" dirty="0">
                 <a:solidFill>
                   <a:srgbClr val="000000"/>
                 </a:solidFill>
@@ -15559,7 +15544,7 @@
               <a:t> Thread[</a:t>
             </a:r>
             <a:r>
-              <a:rPr lang="en-US" sz="2400" dirty="0" err="1">
+              <a:rPr lang="en-US" sz="2150" dirty="0" err="1">
                 <a:solidFill>
                   <a:srgbClr val="000000"/>
                 </a:solidFill>
@@ -15568,7 +15553,7 @@
               <a:t>threadsCount</a:t>
             </a:r>
             <a:r>
-              <a:rPr lang="en-US" sz="2400" dirty="0">
+              <a:rPr lang="en-US" sz="2150" dirty="0">
                 <a:solidFill>
                   <a:srgbClr val="000000"/>
                 </a:solidFill>
@@ -15579,7 +15564,7 @@
           </a:p>
           <a:p>
             <a:r>
-              <a:rPr lang="en-US" sz="2400" dirty="0">
+              <a:rPr lang="en-US" sz="2150" dirty="0">
                 <a:solidFill>
                   <a:srgbClr val="000000"/>
                 </a:solidFill>
@@ -15588,7 +15573,7 @@
               <a:t>    </a:t>
             </a:r>
             <a:r>
-              <a:rPr lang="en-US" sz="2400" dirty="0" err="1">
+              <a:rPr lang="en-US" sz="2150" dirty="0" err="1">
                 <a:solidFill>
                   <a:srgbClr val="0000FF"/>
                 </a:solidFill>
@@ -15597,7 +15582,7 @@
               <a:t>var</a:t>
             </a:r>
             <a:r>
-              <a:rPr lang="en-US" sz="2400" dirty="0">
+              <a:rPr lang="en-US" sz="2150" dirty="0">
                 <a:solidFill>
                   <a:srgbClr val="000000"/>
                 </a:solidFill>
@@ -15606,7 +15591,7 @@
               <a:t> </a:t>
             </a:r>
             <a:r>
-              <a:rPr lang="en-US" sz="2400" dirty="0" err="1">
+              <a:rPr lang="en-US" sz="2150" dirty="0" err="1">
                 <a:solidFill>
                   <a:srgbClr val="000000"/>
                 </a:solidFill>
@@ -15615,7 +15600,7 @@
               <a:t>iterationsOnThread</a:t>
             </a:r>
             <a:r>
-              <a:rPr lang="en-US" sz="2400" dirty="0">
+              <a:rPr lang="en-US" sz="2150" dirty="0">
                 <a:solidFill>
                   <a:srgbClr val="000000"/>
                 </a:solidFill>
@@ -15624,7 +15609,7 @@
               <a:t> = (</a:t>
             </a:r>
             <a:r>
-              <a:rPr lang="en-US" sz="2400" dirty="0">
+              <a:rPr lang="en-US" sz="2150" dirty="0">
                 <a:solidFill>
                   <a:srgbClr val="0000FF"/>
                 </a:solidFill>
@@ -15633,7 +15618,7 @@
               <a:t>double</a:t>
             </a:r>
             <a:r>
-              <a:rPr lang="en-US" sz="2400" dirty="0">
+              <a:rPr lang="en-US" sz="2150" dirty="0">
                 <a:solidFill>
                   <a:srgbClr val="000000"/>
                 </a:solidFill>
@@ -15642,7 +15627,7 @@
               <a:t>)n / </a:t>
             </a:r>
             <a:r>
-              <a:rPr lang="en-US" sz="2400" dirty="0" err="1">
+              <a:rPr lang="en-US" sz="2150" dirty="0" err="1">
                 <a:solidFill>
                   <a:srgbClr val="000000"/>
                 </a:solidFill>
@@ -15651,7 +15636,7 @@
               <a:t>threadsCount</a:t>
             </a:r>
             <a:r>
-              <a:rPr lang="en-US" sz="2400" dirty="0" smtClean="0">
+              <a:rPr lang="en-US" sz="2150" dirty="0" smtClean="0">
                 <a:solidFill>
                   <a:srgbClr val="000000"/>
                 </a:solidFill>
@@ -15659,7 +15644,7 @@
               </a:rPr>
               <a:t>;</a:t>
             </a:r>
-            <a:endParaRPr lang="ru-RU" sz="2400" dirty="0">
+            <a:endParaRPr lang="ru-RU" sz="2150" dirty="0">
               <a:solidFill>
                 <a:srgbClr val="000000"/>
               </a:solidFill>
@@ -15668,7 +15653,7 @@
           </a:p>
           <a:p>
             <a:r>
-              <a:rPr lang="en-US" sz="2400" dirty="0">
+              <a:rPr lang="en-US" sz="2150" dirty="0">
                 <a:solidFill>
                   <a:srgbClr val="000000"/>
                 </a:solidFill>
@@ -15677,7 +15662,7 @@
               <a:t>    </a:t>
             </a:r>
             <a:r>
-              <a:rPr lang="en-US" sz="2400" dirty="0">
+              <a:rPr lang="en-US" sz="2150" dirty="0">
                 <a:solidFill>
                   <a:srgbClr val="0000FF"/>
                 </a:solidFill>
@@ -15686,7 +15671,7 @@
               <a:t>for</a:t>
             </a:r>
             <a:r>
-              <a:rPr lang="en-US" sz="2400" dirty="0">
+              <a:rPr lang="en-US" sz="2150" dirty="0">
                 <a:solidFill>
                   <a:srgbClr val="000000"/>
                 </a:solidFill>
@@ -15695,7 +15680,7 @@
               <a:t> (</a:t>
             </a:r>
             <a:r>
-              <a:rPr lang="en-US" sz="2400" dirty="0" err="1">
+              <a:rPr lang="en-US" sz="2150" dirty="0" err="1">
                 <a:solidFill>
                   <a:srgbClr val="0000FF"/>
                 </a:solidFill>
@@ -15704,7 +15689,7 @@
               <a:t>int</a:t>
             </a:r>
             <a:r>
-              <a:rPr lang="en-US" sz="2400" dirty="0">
+              <a:rPr lang="en-US" sz="2150" dirty="0">
                 <a:solidFill>
                   <a:srgbClr val="000000"/>
                 </a:solidFill>
@@ -15713,7 +15698,7 @@
               <a:t> </a:t>
             </a:r>
             <a:r>
-              <a:rPr lang="en-US" sz="2400" dirty="0" err="1">
+              <a:rPr lang="en-US" sz="2150" dirty="0" err="1">
                 <a:solidFill>
                   <a:srgbClr val="000000"/>
                 </a:solidFill>
@@ -15722,7 +15707,7 @@
               <a:t>i</a:t>
             </a:r>
             <a:r>
-              <a:rPr lang="en-US" sz="2400" dirty="0">
+              <a:rPr lang="en-US" sz="2150" dirty="0">
                 <a:solidFill>
                   <a:srgbClr val="000000"/>
                 </a:solidFill>
@@ -15731,7 +15716,7 @@
               <a:t> = 0; </a:t>
             </a:r>
             <a:r>
-              <a:rPr lang="en-US" sz="2400" dirty="0" err="1">
+              <a:rPr lang="en-US" sz="2150" dirty="0" err="1">
                 <a:solidFill>
                   <a:srgbClr val="000000"/>
                 </a:solidFill>
@@ -15740,7 +15725,7 @@
               <a:t>i</a:t>
             </a:r>
             <a:r>
-              <a:rPr lang="en-US" sz="2400" dirty="0">
+              <a:rPr lang="en-US" sz="2150" dirty="0">
                 <a:solidFill>
                   <a:srgbClr val="000000"/>
                 </a:solidFill>
@@ -15749,7 +15734,7 @@
               <a:t> &lt; </a:t>
             </a:r>
             <a:r>
-              <a:rPr lang="en-US" sz="2400" dirty="0" err="1">
+              <a:rPr lang="en-US" sz="2150" dirty="0" err="1">
                 <a:solidFill>
                   <a:srgbClr val="000000"/>
                 </a:solidFill>
@@ -15758,7 +15743,7 @@
               <a:t>threadsCount</a:t>
             </a:r>
             <a:r>
-              <a:rPr lang="en-US" sz="2400" dirty="0">
+              <a:rPr lang="en-US" sz="2150" dirty="0">
                 <a:solidFill>
                   <a:srgbClr val="000000"/>
                 </a:solidFill>
@@ -15767,7 +15752,7 @@
               <a:t>; </a:t>
             </a:r>
             <a:r>
-              <a:rPr lang="en-US" sz="2400" dirty="0" err="1">
+              <a:rPr lang="en-US" sz="2150" dirty="0" err="1">
                 <a:solidFill>
                   <a:srgbClr val="000000"/>
                 </a:solidFill>
@@ -15776,7 +15761,7 @@
               <a:t>i</a:t>
             </a:r>
             <a:r>
-              <a:rPr lang="en-US" sz="2400" dirty="0">
+              <a:rPr lang="en-US" sz="2150" dirty="0">
                 <a:solidFill>
                   <a:srgbClr val="000000"/>
                 </a:solidFill>
@@ -15787,7 +15772,7 @@
           </a:p>
           <a:p>
             <a:r>
-              <a:rPr lang="ru-RU" sz="2400" dirty="0">
+              <a:rPr lang="ru-RU" sz="2150" dirty="0">
                 <a:solidFill>
                   <a:srgbClr val="000000"/>
                 </a:solidFill>
@@ -15798,7 +15783,7 @@
           </a:p>
           <a:p>
             <a:r>
-              <a:rPr lang="en-US" sz="2400" dirty="0">
+              <a:rPr lang="en-US" sz="2150" dirty="0">
                 <a:solidFill>
                   <a:srgbClr val="000000"/>
                 </a:solidFill>
@@ -15807,7 +15792,7 @@
               <a:t>        </a:t>
             </a:r>
             <a:r>
-              <a:rPr lang="en-US" sz="2400" dirty="0" err="1">
+              <a:rPr lang="en-US" sz="2150" dirty="0" err="1">
                 <a:solidFill>
                   <a:srgbClr val="0000FF"/>
                 </a:solidFill>
@@ -15816,7 +15801,7 @@
               <a:t>var</a:t>
             </a:r>
             <a:r>
-              <a:rPr lang="en-US" sz="2400" dirty="0">
+              <a:rPr lang="en-US" sz="2150" dirty="0">
                 <a:solidFill>
                   <a:srgbClr val="000000"/>
                 </a:solidFill>
@@ -15825,7 +15810,7 @@
               <a:t> from = (</a:t>
             </a:r>
             <a:r>
-              <a:rPr lang="en-US" sz="2400" dirty="0">
+              <a:rPr lang="en-US" sz="2150" dirty="0">
                 <a:solidFill>
                   <a:srgbClr val="0000FF"/>
                 </a:solidFill>
@@ -15834,7 +15819,7 @@
               <a:t>long</a:t>
             </a:r>
             <a:r>
-              <a:rPr lang="en-US" sz="2400" dirty="0">
+              <a:rPr lang="en-US" sz="2150" dirty="0">
                 <a:solidFill>
                   <a:srgbClr val="000000"/>
                 </a:solidFill>
@@ -15843,7 +15828,7 @@
               <a:t>)(</a:t>
             </a:r>
             <a:r>
-              <a:rPr lang="en-US" sz="2400" dirty="0" err="1">
+              <a:rPr lang="en-US" sz="2150" dirty="0" err="1">
                 <a:solidFill>
                   <a:srgbClr val="000000"/>
                 </a:solidFill>
@@ -15852,7 +15837,7 @@
               <a:t>i</a:t>
             </a:r>
             <a:r>
-              <a:rPr lang="en-US" sz="2400" dirty="0">
+              <a:rPr lang="en-US" sz="2150" dirty="0">
                 <a:solidFill>
                   <a:srgbClr val="000000"/>
                 </a:solidFill>
@@ -15861,7 +15846,7 @@
               <a:t> * </a:t>
             </a:r>
             <a:r>
-              <a:rPr lang="en-US" sz="2400" dirty="0" err="1">
+              <a:rPr lang="en-US" sz="2150" dirty="0" err="1">
                 <a:solidFill>
                   <a:srgbClr val="000000"/>
                 </a:solidFill>
@@ -15870,7 +15855,7 @@
               <a:t>iterationsOnThread</a:t>
             </a:r>
             <a:r>
-              <a:rPr lang="en-US" sz="2400" dirty="0">
+              <a:rPr lang="en-US" sz="2150" dirty="0">
                 <a:solidFill>
                   <a:srgbClr val="000000"/>
                 </a:solidFill>
@@ -15881,7 +15866,7 @@
           </a:p>
           <a:p>
             <a:r>
-              <a:rPr lang="en-US" sz="2400" dirty="0">
+              <a:rPr lang="en-US" sz="2150" dirty="0">
                 <a:solidFill>
                   <a:srgbClr val="000000"/>
                 </a:solidFill>
@@ -15890,7 +15875,7 @@
               <a:t>        </a:t>
             </a:r>
             <a:r>
-              <a:rPr lang="en-US" sz="2400" dirty="0" err="1">
+              <a:rPr lang="en-US" sz="2150" dirty="0" err="1">
                 <a:solidFill>
                   <a:srgbClr val="0000FF"/>
                 </a:solidFill>
@@ -15899,7 +15884,7 @@
               <a:t>var</a:t>
             </a:r>
             <a:r>
-              <a:rPr lang="en-US" sz="2400" dirty="0">
+              <a:rPr lang="en-US" sz="2150" dirty="0">
                 <a:solidFill>
                   <a:srgbClr val="000000"/>
                 </a:solidFill>
@@ -15908,7 +15893,7 @@
               <a:t> to = (</a:t>
             </a:r>
             <a:r>
-              <a:rPr lang="en-US" sz="2400" dirty="0">
+              <a:rPr lang="en-US" sz="2150" dirty="0">
                 <a:solidFill>
                   <a:srgbClr val="0000FF"/>
                 </a:solidFill>
@@ -15917,7 +15902,7 @@
               <a:t>long</a:t>
             </a:r>
             <a:r>
-              <a:rPr lang="en-US" sz="2400" dirty="0">
+              <a:rPr lang="en-US" sz="2150" dirty="0">
                 <a:solidFill>
                   <a:srgbClr val="000000"/>
                 </a:solidFill>
@@ -15926,7 +15911,7 @@
               <a:t>)((</a:t>
             </a:r>
             <a:r>
-              <a:rPr lang="en-US" sz="2400" dirty="0" err="1">
+              <a:rPr lang="en-US" sz="2150" dirty="0" err="1">
                 <a:solidFill>
                   <a:srgbClr val="000000"/>
                 </a:solidFill>
@@ -15935,7 +15920,7 @@
               <a:t>i</a:t>
             </a:r>
             <a:r>
-              <a:rPr lang="en-US" sz="2400" dirty="0">
+              <a:rPr lang="en-US" sz="2150" dirty="0">
                 <a:solidFill>
                   <a:srgbClr val="000000"/>
                 </a:solidFill>
@@ -15944,7 +15929,7 @@
               <a:t> + 1) * </a:t>
             </a:r>
             <a:r>
-              <a:rPr lang="en-US" sz="2400" dirty="0" err="1">
+              <a:rPr lang="en-US" sz="2150" dirty="0" err="1">
                 <a:solidFill>
                   <a:srgbClr val="000000"/>
                 </a:solidFill>
@@ -15953,7 +15938,7 @@
               <a:t>iterationsOnThread</a:t>
             </a:r>
             <a:r>
-              <a:rPr lang="en-US" sz="2400" dirty="0" smtClean="0">
+              <a:rPr lang="en-US" sz="2150" dirty="0" smtClean="0">
                 <a:solidFill>
                   <a:srgbClr val="000000"/>
                 </a:solidFill>
@@ -15961,7 +15946,7 @@
               </a:rPr>
               <a:t>);</a:t>
             </a:r>
-            <a:endParaRPr lang="ru-RU" sz="2400" dirty="0">
+            <a:endParaRPr lang="ru-RU" sz="2150" dirty="0">
               <a:solidFill>
                 <a:srgbClr val="000000"/>
               </a:solidFill>
@@ -15970,7 +15955,7 @@
           </a:p>
           <a:p>
             <a:r>
-              <a:rPr lang="en-US" sz="2400" dirty="0">
+              <a:rPr lang="en-US" sz="2150" dirty="0">
                 <a:solidFill>
                   <a:srgbClr val="000000"/>
                 </a:solidFill>
@@ -15979,7 +15964,7 @@
               <a:t>        Thread </a:t>
             </a:r>
             <a:r>
-              <a:rPr lang="en-US" sz="2400" dirty="0" err="1" smtClean="0">
+              <a:rPr lang="en-US" sz="2150" dirty="0" err="1" smtClean="0">
                 <a:solidFill>
                   <a:srgbClr val="000000"/>
                 </a:solidFill>
@@ -15988,7 +15973,7 @@
               <a:t>myThread</a:t>
             </a:r>
             <a:r>
-              <a:rPr lang="en-US" sz="2400" dirty="0" smtClean="0">
+              <a:rPr lang="en-US" sz="2150" dirty="0" smtClean="0">
                 <a:solidFill>
                   <a:srgbClr val="000000"/>
                 </a:solidFill>
@@ -15997,7 +15982,7 @@
               <a:t>=</a:t>
             </a:r>
             <a:r>
-              <a:rPr lang="en-US" sz="2400" dirty="0" smtClean="0">
+              <a:rPr lang="en-US" sz="2150" dirty="0" smtClean="0">
                 <a:solidFill>
                   <a:srgbClr val="0000FF"/>
                 </a:solidFill>
@@ -16006,16 +15991,43 @@
               <a:t>new</a:t>
             </a:r>
             <a:r>
-              <a:rPr lang="en-US" sz="2400" dirty="0" smtClean="0">
-                <a:solidFill>
-                  <a:srgbClr val="000000"/>
-                </a:solidFill>
-                <a:latin typeface="Cascadia Mono" panose="020B0609020000020004" pitchFamily="49" charset="0"/>
-              </a:rPr>
-              <a:t>(()=&gt;</a:t>
-            </a:r>
-            <a:r>
-              <a:rPr lang="en-US" sz="2400" dirty="0" err="1" smtClean="0">
+              <a:rPr lang="en-US" sz="2150" dirty="0" smtClean="0">
+                <a:solidFill>
+                  <a:srgbClr val="000000"/>
+                </a:solidFill>
+                <a:latin typeface="Cascadia Mono" panose="020B0609020000020004" pitchFamily="49" charset="0"/>
+              </a:rPr>
+              <a:t>(()</a:t>
+            </a:r>
+            <a:r>
+              <a:rPr lang="ru-RU" sz="2150" dirty="0" smtClean="0">
+                <a:solidFill>
+                  <a:srgbClr val="000000"/>
+                </a:solidFill>
+                <a:latin typeface="Cascadia Mono" panose="020B0609020000020004" pitchFamily="49" charset="0"/>
+              </a:rPr>
+              <a:t> </a:t>
+            </a:r>
+            <a:r>
+              <a:rPr lang="en-US" sz="2150" dirty="0" smtClean="0">
+                <a:solidFill>
+                  <a:srgbClr val="000000"/>
+                </a:solidFill>
+                <a:latin typeface="Cascadia Mono" panose="020B0609020000020004" pitchFamily="49" charset="0"/>
+              </a:rPr>
+              <a:t>=&gt;</a:t>
+            </a:r>
+            <a:r>
+              <a:rPr lang="ru-RU" sz="2150" dirty="0" smtClean="0">
+                <a:solidFill>
+                  <a:srgbClr val="000000"/>
+                </a:solidFill>
+                <a:latin typeface="Cascadia Mono" panose="020B0609020000020004" pitchFamily="49" charset="0"/>
+              </a:rPr>
+              <a:t> </a:t>
+            </a:r>
+            <a:r>
+              <a:rPr lang="en-US" sz="2150" dirty="0" err="1" smtClean="0">
                 <a:solidFill>
                   <a:srgbClr val="000000"/>
                 </a:solidFill>
@@ -16024,25 +16036,43 @@
               <a:t>CalculatePiThread</a:t>
             </a:r>
             <a:r>
-              <a:rPr lang="en-US" sz="2400" dirty="0" smtClean="0">
-                <a:solidFill>
-                  <a:srgbClr val="000000"/>
-                </a:solidFill>
-                <a:latin typeface="Cascadia Mono" panose="020B0609020000020004" pitchFamily="49" charset="0"/>
-              </a:rPr>
-              <a:t>(</a:t>
-            </a:r>
-            <a:r>
-              <a:rPr lang="en-US" sz="2400" dirty="0" err="1" smtClean="0">
-                <a:solidFill>
-                  <a:srgbClr val="000000"/>
-                </a:solidFill>
-                <a:latin typeface="Cascadia Mono" panose="020B0609020000020004" pitchFamily="49" charset="0"/>
-              </a:rPr>
-              <a:t>from,to,</a:t>
-            </a:r>
-            <a:r>
-              <a:rPr lang="en-US" sz="2400" dirty="0" err="1" smtClean="0">
+              <a:rPr lang="en-US" sz="2150" dirty="0" smtClean="0">
+                <a:solidFill>
+                  <a:srgbClr val="000000"/>
+                </a:solidFill>
+                <a:latin typeface="Cascadia Mono" panose="020B0609020000020004" pitchFamily="49" charset="0"/>
+              </a:rPr>
+              <a:t>(from,</a:t>
+            </a:r>
+            <a:r>
+              <a:rPr lang="ru-RU" sz="2150" dirty="0" smtClean="0">
+                <a:solidFill>
+                  <a:srgbClr val="000000"/>
+                </a:solidFill>
+                <a:latin typeface="Cascadia Mono" panose="020B0609020000020004" pitchFamily="49" charset="0"/>
+              </a:rPr>
+              <a:t> </a:t>
+            </a:r>
+            <a:r>
+              <a:rPr lang="en-US" sz="2150" dirty="0" smtClean="0">
+                <a:solidFill>
+                  <a:srgbClr val="000000"/>
+                </a:solidFill>
+                <a:latin typeface="Cascadia Mono" panose="020B0609020000020004" pitchFamily="49" charset="0"/>
+              </a:rPr>
+              <a:t>to,</a:t>
+            </a:r>
+            <a:r>
+              <a:rPr lang="ru-RU" sz="2150" dirty="0" smtClean="0">
+                <a:solidFill>
+                  <a:srgbClr val="000000"/>
+                </a:solidFill>
+                <a:latin typeface="Cascadia Mono" panose="020B0609020000020004" pitchFamily="49" charset="0"/>
+              </a:rPr>
+              <a:t> </a:t>
+            </a:r>
+            <a:r>
+              <a:rPr lang="en-US" sz="2150" dirty="0" smtClean="0">
                 <a:solidFill>
                   <a:srgbClr val="0000FF"/>
                 </a:solidFill>
@@ -16051,7 +16081,7 @@
               <a:t>ref</a:t>
             </a:r>
             <a:r>
-              <a:rPr lang="en-US" sz="2400" dirty="0" smtClean="0">
+              <a:rPr lang="en-US" sz="2150" dirty="0" smtClean="0">
                 <a:solidFill>
                   <a:srgbClr val="000000"/>
                 </a:solidFill>
@@ -16060,7 +16090,7 @@
               <a:t> </a:t>
             </a:r>
             <a:r>
-              <a:rPr lang="en-US" sz="2400" dirty="0">
+              <a:rPr lang="en-US" sz="2150" dirty="0">
                 <a:solidFill>
                   <a:srgbClr val="000000"/>
                 </a:solidFill>
@@ -16071,7 +16101,7 @@
           </a:p>
           <a:p>
             <a:r>
-              <a:rPr lang="en-US" sz="2400" dirty="0">
+              <a:rPr lang="en-US" sz="2150" dirty="0">
                 <a:solidFill>
                   <a:srgbClr val="000000"/>
                 </a:solidFill>
@@ -16080,7 +16110,7 @@
               <a:t>        </a:t>
             </a:r>
             <a:r>
-              <a:rPr lang="en-US" sz="2400" dirty="0" err="1">
+              <a:rPr lang="en-US" sz="2150" dirty="0" err="1">
                 <a:solidFill>
                   <a:srgbClr val="000000"/>
                 </a:solidFill>
@@ -16089,7 +16119,7 @@
               <a:t>myThread.Name</a:t>
             </a:r>
             <a:r>
-              <a:rPr lang="en-US" sz="2400" dirty="0">
+              <a:rPr lang="en-US" sz="2150" dirty="0">
                 <a:solidFill>
                   <a:srgbClr val="000000"/>
                 </a:solidFill>
@@ -16098,7 +16128,7 @@
               <a:t> = </a:t>
             </a:r>
             <a:r>
-              <a:rPr lang="en-US" sz="2400" dirty="0">
+              <a:rPr lang="en-US" sz="2150" dirty="0">
                 <a:solidFill>
                   <a:srgbClr val="A31515"/>
                 </a:solidFill>
@@ -16107,7 +16137,7 @@
               <a:t>$"</a:t>
             </a:r>
             <a:r>
-              <a:rPr lang="ru-RU" sz="2400" dirty="0">
+              <a:rPr lang="ru-RU" sz="2150" dirty="0">
                 <a:solidFill>
                   <a:srgbClr val="A31515"/>
                 </a:solidFill>
@@ -16116,7 +16146,7 @@
               <a:t>Поток </a:t>
             </a:r>
             <a:r>
-              <a:rPr lang="ru-RU" sz="2400" dirty="0">
+              <a:rPr lang="ru-RU" sz="2150" dirty="0">
                 <a:solidFill>
                   <a:srgbClr val="000000"/>
                 </a:solidFill>
@@ -16125,7 +16155,7 @@
               <a:t>{</a:t>
             </a:r>
             <a:r>
-              <a:rPr lang="en-US" sz="2400" dirty="0" err="1">
+              <a:rPr lang="en-US" sz="2150" dirty="0" err="1">
                 <a:solidFill>
                   <a:srgbClr val="000000"/>
                 </a:solidFill>
@@ -16134,7 +16164,7 @@
               <a:t>i</a:t>
             </a:r>
             <a:r>
-              <a:rPr lang="en-US" sz="2400" dirty="0">
+              <a:rPr lang="en-US" sz="2150" dirty="0">
                 <a:solidFill>
                   <a:srgbClr val="000000"/>
                 </a:solidFill>
@@ -16143,7 +16173,7 @@
               <a:t>}</a:t>
             </a:r>
             <a:r>
-              <a:rPr lang="en-US" sz="2400" dirty="0">
+              <a:rPr lang="en-US" sz="2150" dirty="0">
                 <a:solidFill>
                   <a:srgbClr val="A31515"/>
                 </a:solidFill>
@@ -16152,7 +16182,7 @@
               <a:t>"</a:t>
             </a:r>
             <a:r>
-              <a:rPr lang="en-US" sz="2400" dirty="0">
+              <a:rPr lang="en-US" sz="2150" dirty="0">
                 <a:solidFill>
                   <a:srgbClr val="000000"/>
                 </a:solidFill>
@@ -16163,7 +16193,7 @@
           </a:p>
           <a:p>
             <a:r>
-              <a:rPr lang="en-US" sz="2400" dirty="0">
+              <a:rPr lang="en-US" sz="2150" dirty="0">
                 <a:solidFill>
                   <a:srgbClr val="000000"/>
                 </a:solidFill>
@@ -16172,7 +16202,7 @@
               <a:t>        threads[</a:t>
             </a:r>
             <a:r>
-              <a:rPr lang="en-US" sz="2400" dirty="0" err="1">
+              <a:rPr lang="en-US" sz="2150" dirty="0" err="1">
                 <a:solidFill>
                   <a:srgbClr val="000000"/>
                 </a:solidFill>
@@ -16181,7 +16211,7 @@
               <a:t>i</a:t>
             </a:r>
             <a:r>
-              <a:rPr lang="en-US" sz="2400" dirty="0">
+              <a:rPr lang="en-US" sz="2150" dirty="0">
                 <a:solidFill>
                   <a:srgbClr val="000000"/>
                 </a:solidFill>
@@ -16190,7 +16220,7 @@
               <a:t>] = </a:t>
             </a:r>
             <a:r>
-              <a:rPr lang="en-US" sz="2400" dirty="0" err="1">
+              <a:rPr lang="en-US" sz="2150" dirty="0" err="1">
                 <a:solidFill>
                   <a:srgbClr val="000000"/>
                 </a:solidFill>
@@ -16199,7 +16229,7 @@
               <a:t>myThread</a:t>
             </a:r>
             <a:r>
-              <a:rPr lang="en-US" sz="2400" dirty="0">
+              <a:rPr lang="en-US" sz="2150" dirty="0">
                 <a:solidFill>
                   <a:srgbClr val="000000"/>
                 </a:solidFill>
@@ -16210,7 +16240,7 @@
           </a:p>
           <a:p>
             <a:r>
-              <a:rPr lang="en-US" sz="2400" dirty="0">
+              <a:rPr lang="en-US" sz="2150" dirty="0">
                 <a:solidFill>
                   <a:srgbClr val="000000"/>
                 </a:solidFill>
@@ -16219,7 +16249,7 @@
               <a:t>        </a:t>
             </a:r>
             <a:r>
-              <a:rPr lang="en-US" sz="2400" dirty="0" err="1">
+              <a:rPr lang="en-US" sz="2150" dirty="0" err="1">
                 <a:solidFill>
                   <a:srgbClr val="000000"/>
                 </a:solidFill>
@@ -16228,7 +16258,7 @@
               <a:t>myThread.Start</a:t>
             </a:r>
             <a:r>
-              <a:rPr lang="en-US" sz="2400" dirty="0">
+              <a:rPr lang="en-US" sz="2150" dirty="0">
                 <a:solidFill>
                   <a:srgbClr val="000000"/>
                 </a:solidFill>
@@ -16239,7 +16269,7 @@
           </a:p>
           <a:p>
             <a:r>
-              <a:rPr lang="ru-RU" sz="2400" dirty="0">
+              <a:rPr lang="ru-RU" sz="2150" dirty="0">
                 <a:solidFill>
                   <a:srgbClr val="000000"/>
                 </a:solidFill>
@@ -16248,7 +16278,7 @@
               <a:t>    </a:t>
             </a:r>
             <a:r>
-              <a:rPr lang="ru-RU" sz="2400" dirty="0" smtClean="0">
+              <a:rPr lang="ru-RU" sz="2150" dirty="0" smtClean="0">
                 <a:solidFill>
                   <a:srgbClr val="000000"/>
                 </a:solidFill>
@@ -16256,7 +16286,7 @@
               </a:rPr>
               <a:t>}</a:t>
             </a:r>
-            <a:endParaRPr lang="ru-RU" sz="2400" dirty="0">
+            <a:endParaRPr lang="ru-RU" sz="2150" dirty="0">
               <a:solidFill>
                 <a:srgbClr val="000000"/>
               </a:solidFill>
@@ -16265,7 +16295,7 @@
           </a:p>
           <a:p>
             <a:r>
-              <a:rPr lang="ru-RU" sz="2400" dirty="0">
+              <a:rPr lang="ru-RU" sz="2150" dirty="0">
                 <a:solidFill>
                   <a:srgbClr val="000000"/>
                 </a:solidFill>
@@ -16274,7 +16304,7 @@
               <a:t>    </a:t>
             </a:r>
             <a:r>
-              <a:rPr lang="ru-RU" sz="2400" dirty="0">
+              <a:rPr lang="ru-RU" sz="2150" dirty="0">
                 <a:solidFill>
                   <a:srgbClr val="008000"/>
                 </a:solidFill>
@@ -16282,7 +16312,7 @@
               </a:rPr>
               <a:t>//Ждем пока потоки досчитают</a:t>
             </a:r>
-            <a:endParaRPr lang="ru-RU" sz="2400" dirty="0">
+            <a:endParaRPr lang="ru-RU" sz="2150" dirty="0">
               <a:solidFill>
                 <a:srgbClr val="000000"/>
               </a:solidFill>
@@ -16291,7 +16321,7 @@
           </a:p>
           <a:p>
             <a:r>
-              <a:rPr lang="en-US" sz="2400" dirty="0">
+              <a:rPr lang="en-US" sz="2150" dirty="0">
                 <a:solidFill>
                   <a:srgbClr val="000000"/>
                 </a:solidFill>
@@ -16300,7 +16330,7 @@
               <a:t>    </a:t>
             </a:r>
             <a:r>
-              <a:rPr lang="en-US" sz="2400" dirty="0" err="1">
+              <a:rPr lang="en-US" sz="2150" dirty="0" err="1">
                 <a:solidFill>
                   <a:srgbClr val="0000FF"/>
                 </a:solidFill>
@@ -16309,7 +16339,7 @@
               <a:t>foreach</a:t>
             </a:r>
             <a:r>
-              <a:rPr lang="en-US" sz="2400" dirty="0">
+              <a:rPr lang="en-US" sz="2150" dirty="0">
                 <a:solidFill>
                   <a:srgbClr val="000000"/>
                 </a:solidFill>
@@ -16318,7 +16348,7 @@
               <a:t> (</a:t>
             </a:r>
             <a:r>
-              <a:rPr lang="en-US" sz="2400" dirty="0" err="1">
+              <a:rPr lang="en-US" sz="2150" dirty="0" err="1">
                 <a:solidFill>
                   <a:srgbClr val="000000"/>
                 </a:solidFill>
@@ -16327,7 +16357,7 @@
               <a:t>var</a:t>
             </a:r>
             <a:r>
-              <a:rPr lang="en-US" sz="2400" dirty="0">
+              <a:rPr lang="en-US" sz="2150" dirty="0">
                 <a:solidFill>
                   <a:srgbClr val="000000"/>
                 </a:solidFill>
@@ -16336,7 +16366,7 @@
               <a:t> thread </a:t>
             </a:r>
             <a:r>
-              <a:rPr lang="en-US" sz="2400" dirty="0">
+              <a:rPr lang="en-US" sz="2150" dirty="0">
                 <a:solidFill>
                   <a:srgbClr val="0000FF"/>
                 </a:solidFill>
@@ -16345,7 +16375,7 @@
               <a:t>in</a:t>
             </a:r>
             <a:r>
-              <a:rPr lang="en-US" sz="2400" dirty="0">
+              <a:rPr lang="en-US" sz="2150" dirty="0">
                 <a:solidFill>
                   <a:srgbClr val="000000"/>
                 </a:solidFill>
@@ -16354,7 +16384,7 @@
               <a:t> threads</a:t>
             </a:r>
             <a:r>
-              <a:rPr lang="en-US" sz="2400" dirty="0" smtClean="0">
+              <a:rPr lang="en-US" sz="2150" dirty="0" smtClean="0">
                 <a:solidFill>
                   <a:srgbClr val="000000"/>
                 </a:solidFill>
@@ -16363,7 +16393,7 @@
               <a:t>) </a:t>
             </a:r>
             <a:r>
-              <a:rPr lang="en-US" sz="2400" dirty="0" err="1" smtClean="0">
+              <a:rPr lang="en-US" sz="2150" dirty="0" err="1" smtClean="0">
                 <a:solidFill>
                   <a:srgbClr val="000000"/>
                 </a:solidFill>
@@ -16372,7 +16402,7 @@
               <a:t>thread.Join</a:t>
             </a:r>
             <a:r>
-              <a:rPr lang="en-US" sz="2400" dirty="0" smtClean="0">
+              <a:rPr lang="en-US" sz="2150" dirty="0" smtClean="0">
                 <a:solidFill>
                   <a:srgbClr val="000000"/>
                 </a:solidFill>
@@ -16380,7 +16410,7 @@
               </a:rPr>
               <a:t>();</a:t>
             </a:r>
-            <a:endParaRPr lang="ru-RU" sz="2400" dirty="0">
+            <a:endParaRPr lang="ru-RU" sz="2150" dirty="0">
               <a:solidFill>
                 <a:srgbClr val="000000"/>
               </a:solidFill>
@@ -16389,7 +16419,7 @@
           </a:p>
           <a:p>
             <a:r>
-              <a:rPr lang="en-US" sz="2400" dirty="0">
+              <a:rPr lang="en-US" sz="2150" dirty="0">
                 <a:solidFill>
                   <a:srgbClr val="000000"/>
                 </a:solidFill>
@@ -16398,7 +16428,7 @@
               <a:t>    </a:t>
             </a:r>
             <a:r>
-              <a:rPr lang="en-US" sz="2400" dirty="0">
+              <a:rPr lang="en-US" sz="2150" dirty="0">
                 <a:solidFill>
                   <a:srgbClr val="0000FF"/>
                 </a:solidFill>
@@ -16407,7 +16437,7 @@
               <a:t>return</a:t>
             </a:r>
             <a:r>
-              <a:rPr lang="en-US" sz="2400" dirty="0">
+              <a:rPr lang="en-US" sz="2150" dirty="0">
                 <a:solidFill>
                   <a:srgbClr val="000000"/>
                 </a:solidFill>
@@ -16418,7 +16448,7 @@
           </a:p>
           <a:p>
             <a:r>
-              <a:rPr lang="ru-RU" sz="2400" dirty="0">
+              <a:rPr lang="ru-RU" sz="2150" dirty="0">
                 <a:solidFill>
                   <a:srgbClr val="000000"/>
                 </a:solidFill>
@@ -16426,7 +16456,7 @@
               </a:rPr>
               <a:t>}</a:t>
             </a:r>
-            <a:endParaRPr lang="en-US" sz="2400" dirty="0">
+            <a:endParaRPr lang="en-US" sz="2150" dirty="0">
               <a:solidFill>
                 <a:srgbClr val="000000"/>
               </a:solidFill>
@@ -16480,15 +16510,15 @@
         </p:nvSpPr>
         <p:spPr>
           <a:xfrm>
-            <a:off x="279400" y="0"/>
-            <a:ext cx="11671300" cy="583686"/>
+            <a:off x="0" y="0"/>
+            <a:ext cx="12192000" cy="646331"/>
           </a:xfrm>
           <a:prstGeom prst="rect">
             <a:avLst/>
           </a:prstGeom>
         </p:spPr>
         <p:txBody>
-          <a:bodyPr wrap="square">
+          <a:bodyPr wrap="square" lIns="360000" rIns="360000">
             <a:spAutoFit/>
           </a:bodyPr>
           <a:lstStyle/>
@@ -16531,7 +16561,7 @@
         </p:blipFill>
         <p:spPr>
           <a:xfrm>
-            <a:off x="341736" y="646331"/>
+            <a:off x="392536" y="646331"/>
             <a:ext cx="3903489" cy="5932269"/>
           </a:xfrm>
           <a:prstGeom prst="rect">
@@ -16584,15 +16614,15 @@
         </p:nvSpPr>
         <p:spPr>
           <a:xfrm>
-            <a:off x="298450" y="654356"/>
-            <a:ext cx="11595100" cy="6186309"/>
+            <a:off x="0" y="654356"/>
+            <a:ext cx="12192000" cy="6186309"/>
           </a:xfrm>
           <a:prstGeom prst="rect">
             <a:avLst/>
           </a:prstGeom>
         </p:spPr>
         <p:txBody>
-          <a:bodyPr wrap="square">
+          <a:bodyPr wrap="square" lIns="360000" rIns="360000">
             <a:spAutoFit/>
           </a:bodyPr>
           <a:lstStyle/>
@@ -17557,13 +17587,34 @@
                         </a:lnSpc>
                       </a:pPr>
                       <a:r>
-                        <a:rPr lang="en-US" sz="2400" b="1">
+                        <a:rPr lang="en-US" sz="2400" b="1" dirty="0" err="1">
                           <a:effectLst/>
                           <a:latin typeface="Bookman Old Style" panose="02050604050505020204" pitchFamily="18" charset="0"/>
                         </a:rPr>
-                        <a:t>Monitor.TryEnter(obj, timeout)</a:t>
+                        <a:t>Monitor.TryEnter</a:t>
                       </a:r>
-                      <a:endParaRPr lang="en-US" sz="2400">
+                      <a:r>
+                        <a:rPr lang="en-US" sz="2400" b="1" dirty="0">
+                          <a:effectLst/>
+                          <a:latin typeface="Bookman Old Style" panose="02050604050505020204" pitchFamily="18" charset="0"/>
+                        </a:rPr>
+                        <a:t>(</a:t>
+                      </a:r>
+                      <a:r>
+                        <a:rPr lang="en-US" sz="2400" b="1" dirty="0" err="1">
+                          <a:effectLst/>
+                          <a:latin typeface="Bookman Old Style" panose="02050604050505020204" pitchFamily="18" charset="0"/>
+                        </a:rPr>
+                        <a:t>obj</a:t>
+                      </a:r>
+                      <a:r>
+                        <a:rPr lang="en-US" sz="2400" b="1" dirty="0">
+                          <a:effectLst/>
+                          <a:latin typeface="Bookman Old Style" panose="02050604050505020204" pitchFamily="18" charset="0"/>
+                        </a:rPr>
+                        <a:t>, timeout)</a:t>
+                      </a:r>
+                      <a:endParaRPr lang="en-US" sz="2400" dirty="0">
                         <a:effectLst/>
                         <a:latin typeface="Bookman Old Style" panose="02050604050505020204" pitchFamily="18" charset="0"/>
                       </a:endParaRPr>
@@ -18179,22 +18230,22 @@
         </p:nvSpPr>
         <p:spPr>
           <a:xfrm>
-            <a:off x="180976" y="0"/>
-            <a:ext cx="11830050" cy="6740307"/>
+            <a:off x="0" y="0"/>
+            <a:ext cx="12192000" cy="6528262"/>
           </a:xfrm>
           <a:prstGeom prst="rect">
             <a:avLst/>
           </a:prstGeom>
         </p:spPr>
         <p:txBody>
-          <a:bodyPr wrap="square">
+          <a:bodyPr wrap="square" lIns="360000" rIns="360000">
             <a:spAutoFit/>
           </a:bodyPr>
           <a:lstStyle/>
           <a:p>
             <a:pPr algn="just">
               <a:lnSpc>
-                <a:spcPct val="150000"/>
+                <a:spcPct val="135000"/>
               </a:lnSpc>
             </a:pPr>
             <a:r>
@@ -18240,7 +18291,7 @@
           <a:p>
             <a:pPr algn="just">
               <a:lnSpc>
-                <a:spcPct val="150000"/>
+                <a:spcPct val="135000"/>
               </a:lnSpc>
             </a:pPr>
             <a:endParaRPr lang="en-US" sz="2400" dirty="0">
@@ -18250,7 +18301,7 @@
           <a:p>
             <a:pPr algn="just">
               <a:lnSpc>
-                <a:spcPct val="150000"/>
+                <a:spcPct val="135000"/>
               </a:lnSpc>
             </a:pPr>
             <a:r>
@@ -18263,7 +18314,7 @@
           <a:p>
             <a:pPr algn="just">
               <a:lnSpc>
-                <a:spcPct val="150000"/>
+                <a:spcPct val="135000"/>
               </a:lnSpc>
             </a:pPr>
             <a:r>
@@ -18276,7 +18327,7 @@
           <a:p>
             <a:pPr algn="just">
               <a:lnSpc>
-                <a:spcPct val="150000"/>
+                <a:spcPct val="135000"/>
               </a:lnSpc>
             </a:pPr>
             <a:r>
@@ -18289,7 +18340,7 @@
           <a:p>
             <a:pPr algn="just">
               <a:lnSpc>
-                <a:spcPct val="150000"/>
+                <a:spcPct val="135000"/>
               </a:lnSpc>
             </a:pPr>
             <a:r>
@@ -18302,7 +18353,7 @@
           <a:p>
             <a:pPr algn="just">
               <a:lnSpc>
-                <a:spcPct val="150000"/>
+                <a:spcPct val="135000"/>
               </a:lnSpc>
             </a:pPr>
             <a:endParaRPr lang="ru-RU" sz="2400" b="1" dirty="0">
@@ -18312,7 +18363,7 @@
           <a:p>
             <a:pPr algn="just">
               <a:lnSpc>
-                <a:spcPct val="150000"/>
+                <a:spcPct val="135000"/>
               </a:lnSpc>
             </a:pPr>
             <a:r>
@@ -18325,7 +18376,7 @@
           <a:p>
             <a:pPr algn="just">
               <a:lnSpc>
-                <a:spcPct val="150000"/>
+                <a:spcPct val="135000"/>
               </a:lnSpc>
             </a:pPr>
             <a:r>
@@ -18338,7 +18389,7 @@
           <a:p>
             <a:pPr algn="just">
               <a:lnSpc>
-                <a:spcPct val="150000"/>
+                <a:spcPct val="135000"/>
               </a:lnSpc>
             </a:pPr>
             <a:r>
@@ -18402,15 +18453,15 @@
         </p:nvSpPr>
         <p:spPr>
           <a:xfrm>
-            <a:off x="298450" y="0"/>
-            <a:ext cx="11595100" cy="6924973"/>
+            <a:off x="0" y="0"/>
+            <a:ext cx="12192000" cy="6924973"/>
           </a:xfrm>
           <a:prstGeom prst="rect">
             <a:avLst/>
           </a:prstGeom>
         </p:spPr>
         <p:txBody>
-          <a:bodyPr wrap="square">
+          <a:bodyPr wrap="square" lIns="360000" rIns="360000">
             <a:spAutoFit/>
           </a:bodyPr>
           <a:lstStyle/>
@@ -19126,15 +19177,15 @@
         </p:nvSpPr>
         <p:spPr>
           <a:xfrm>
-            <a:off x="298450" y="0"/>
-            <a:ext cx="11595100" cy="6555641"/>
+            <a:off x="0" y="0"/>
+            <a:ext cx="12192000" cy="6555641"/>
           </a:xfrm>
           <a:prstGeom prst="rect">
             <a:avLst/>
           </a:prstGeom>
         </p:spPr>
         <p:txBody>
-          <a:bodyPr wrap="square">
+          <a:bodyPr wrap="square" lIns="360000" rIns="360000">
             <a:spAutoFit/>
           </a:bodyPr>
           <a:lstStyle/>
@@ -19848,15 +19899,15 @@
         </p:nvSpPr>
         <p:spPr>
           <a:xfrm>
-            <a:off x="298450" y="241300"/>
-            <a:ext cx="11595100" cy="4524315"/>
+            <a:off x="0" y="241300"/>
+            <a:ext cx="12192000" cy="4524315"/>
           </a:xfrm>
           <a:prstGeom prst="rect">
             <a:avLst/>
           </a:prstGeom>
         </p:spPr>
         <p:txBody>
-          <a:bodyPr wrap="square">
+          <a:bodyPr wrap="square" lIns="360000" rIns="360000">
             <a:spAutoFit/>
           </a:bodyPr>
           <a:lstStyle/>
@@ -20231,15 +20282,15 @@
         </p:nvSpPr>
         <p:spPr>
           <a:xfrm>
-            <a:off x="298450" y="654356"/>
-            <a:ext cx="11595100" cy="5632311"/>
+            <a:off x="0" y="654356"/>
+            <a:ext cx="12192000" cy="5632311"/>
           </a:xfrm>
           <a:prstGeom prst="rect">
             <a:avLst/>
           </a:prstGeom>
         </p:spPr>
         <p:txBody>
-          <a:bodyPr wrap="square">
+          <a:bodyPr wrap="square" lIns="360000" rIns="360000">
             <a:spAutoFit/>
           </a:bodyPr>
           <a:lstStyle/>
@@ -20599,15 +20650,15 @@
         </p:nvSpPr>
         <p:spPr>
           <a:xfrm>
-            <a:off x="298450" y="0"/>
-            <a:ext cx="11595100" cy="2862322"/>
+            <a:off x="0" y="0"/>
+            <a:ext cx="12192000" cy="2862322"/>
           </a:xfrm>
           <a:prstGeom prst="rect">
             <a:avLst/>
           </a:prstGeom>
         </p:spPr>
         <p:txBody>
-          <a:bodyPr wrap="square">
+          <a:bodyPr wrap="square" lIns="360000" rIns="360000">
             <a:spAutoFit/>
           </a:bodyPr>
           <a:lstStyle/>
@@ -21595,15 +21646,15 @@
         </p:nvSpPr>
         <p:spPr>
           <a:xfrm>
-            <a:off x="276224" y="0"/>
-            <a:ext cx="11452225" cy="6555641"/>
+            <a:off x="0" y="0"/>
+            <a:ext cx="12192000" cy="6555641"/>
           </a:xfrm>
           <a:prstGeom prst="rect">
             <a:avLst/>
           </a:prstGeom>
         </p:spPr>
         <p:txBody>
-          <a:bodyPr wrap="square">
+          <a:bodyPr wrap="square" lIns="360000" rIns="360000">
             <a:spAutoFit/>
           </a:bodyPr>
           <a:lstStyle/>
@@ -22518,15 +22569,15 @@
         </p:nvSpPr>
         <p:spPr>
           <a:xfrm>
-            <a:off x="285750" y="0"/>
-            <a:ext cx="11442700" cy="6924973"/>
+            <a:off x="0" y="0"/>
+            <a:ext cx="12192000" cy="6017032"/>
           </a:xfrm>
           <a:prstGeom prst="rect">
             <a:avLst/>
           </a:prstGeom>
         </p:spPr>
         <p:txBody>
-          <a:bodyPr wrap="square">
+          <a:bodyPr wrap="square" lIns="360000" rIns="360000">
             <a:spAutoFit/>
           </a:bodyPr>
           <a:lstStyle/>
@@ -22537,7 +22588,7 @@
               </a:lnSpc>
             </a:pPr>
             <a:r>
-              <a:rPr lang="ru-RU" sz="2400" b="1" dirty="0" err="1">
+              <a:rPr lang="ru-RU" sz="2200" b="1" dirty="0" err="1">
                 <a:solidFill>
                   <a:srgbClr val="000000"/>
                 </a:solidFill>
@@ -22546,7 +22597,7 @@
               <a:t>Межпроцессная</a:t>
             </a:r>
             <a:r>
-              <a:rPr lang="ru-RU" sz="2400" b="1" dirty="0">
+              <a:rPr lang="ru-RU" sz="2200" b="1" dirty="0">
                 <a:solidFill>
                   <a:srgbClr val="000000"/>
                 </a:solidFill>
@@ -22555,7 +22606,7 @@
               <a:t> </a:t>
             </a:r>
             <a:r>
-              <a:rPr lang="ru-RU" sz="2400" b="1" dirty="0" smtClean="0">
+              <a:rPr lang="ru-RU" sz="2200" b="1" dirty="0" smtClean="0">
                 <a:solidFill>
                   <a:srgbClr val="000000"/>
                 </a:solidFill>
@@ -22566,7 +22617,7 @@
           </a:p>
           <a:p>
             <a:r>
-              <a:rPr lang="ru-RU" sz="2400" dirty="0">
+              <a:rPr lang="ru-RU" sz="2200" dirty="0">
                 <a:solidFill>
                   <a:srgbClr val="008000"/>
                 </a:solidFill>
@@ -22578,7 +22629,7 @@
               <a:t>// Создаем именованный </a:t>
             </a:r>
             <a:r>
-              <a:rPr lang="ru-RU" sz="2400" dirty="0" err="1">
+              <a:rPr lang="ru-RU" sz="2200" dirty="0" err="1">
                 <a:solidFill>
                   <a:srgbClr val="008000"/>
                 </a:solidFill>
@@ -22590,7 +22641,7 @@
               <a:t>мьютекс</a:t>
             </a:r>
             <a:r>
-              <a:rPr lang="ru-RU" sz="2400" dirty="0">
+              <a:rPr lang="ru-RU" sz="2200" dirty="0">
                 <a:solidFill>
                   <a:srgbClr val="008000"/>
                 </a:solidFill>
@@ -22601,7 +22652,7 @@
               </a:rPr>
               <a:t> (видимый другим процессам)</a:t>
             </a:r>
-            <a:endParaRPr lang="ru-RU" sz="2400" dirty="0">
+            <a:endParaRPr lang="ru-RU" sz="2200" dirty="0">
               <a:solidFill>
                 <a:srgbClr val="000000"/>
               </a:solidFill>
@@ -22613,7 +22664,7 @@
           </a:p>
           <a:p>
             <a:r>
-              <a:rPr lang="en-US" sz="2400" dirty="0">
+              <a:rPr lang="en-US" sz="2200" dirty="0">
                 <a:solidFill>
                   <a:srgbClr val="0000FF"/>
                 </a:solidFill>
@@ -22625,7 +22676,7 @@
               <a:t>using</a:t>
             </a:r>
             <a:r>
-              <a:rPr lang="en-US" sz="2400" dirty="0">
+              <a:rPr lang="en-US" sz="2200" dirty="0">
                 <a:solidFill>
                   <a:srgbClr val="000000"/>
                 </a:solidFill>
@@ -22637,7 +22688,7 @@
               <a:t> (</a:t>
             </a:r>
             <a:r>
-              <a:rPr lang="en-US" sz="2400" dirty="0" err="1">
+              <a:rPr lang="en-US" sz="2200" dirty="0" err="1">
                 <a:solidFill>
                   <a:srgbClr val="0000FF"/>
                 </a:solidFill>
@@ -22649,7 +22700,7 @@
               <a:t>var</a:t>
             </a:r>
             <a:r>
-              <a:rPr lang="en-US" sz="2400" dirty="0">
+              <a:rPr lang="en-US" sz="2200" dirty="0">
                 <a:solidFill>
                   <a:srgbClr val="000000"/>
                 </a:solidFill>
@@ -22661,7 +22712,7 @@
               <a:t> </a:t>
             </a:r>
             <a:r>
-              <a:rPr lang="en-US" sz="2400" dirty="0" err="1">
+              <a:rPr lang="en-US" sz="2200" dirty="0" err="1">
                 <a:solidFill>
                   <a:srgbClr val="000000"/>
                 </a:solidFill>
@@ -22673,7 +22724,7 @@
               <a:t>mutex</a:t>
             </a:r>
             <a:r>
-              <a:rPr lang="en-US" sz="2400" dirty="0">
+              <a:rPr lang="en-US" sz="2200" dirty="0">
                 <a:solidFill>
                   <a:srgbClr val="000000"/>
                 </a:solidFill>
@@ -22685,7 +22736,7 @@
               <a:t> = </a:t>
             </a:r>
             <a:r>
-              <a:rPr lang="en-US" sz="2400" dirty="0">
+              <a:rPr lang="en-US" sz="2200" dirty="0">
                 <a:solidFill>
                   <a:srgbClr val="0000FF"/>
                 </a:solidFill>
@@ -22697,7 +22748,7 @@
               <a:t>new</a:t>
             </a:r>
             <a:r>
-              <a:rPr lang="en-US" sz="2400" dirty="0">
+              <a:rPr lang="en-US" sz="2200" dirty="0">
                 <a:solidFill>
                   <a:srgbClr val="000000"/>
                 </a:solidFill>
@@ -22709,7 +22760,7 @@
               <a:t> </a:t>
             </a:r>
             <a:r>
-              <a:rPr lang="en-US" sz="2400" dirty="0" err="1">
+              <a:rPr lang="en-US" sz="2200" dirty="0" err="1">
                 <a:solidFill>
                   <a:srgbClr val="2B91AF"/>
                 </a:solidFill>
@@ -22721,7 +22772,7 @@
               <a:t>Mutex</a:t>
             </a:r>
             <a:r>
-              <a:rPr lang="en-US" sz="2400" dirty="0">
+              <a:rPr lang="en-US" sz="2200" dirty="0">
                 <a:solidFill>
                   <a:srgbClr val="000000"/>
                 </a:solidFill>
@@ -22733,7 +22784,7 @@
               <a:t>(</a:t>
             </a:r>
             <a:r>
-              <a:rPr lang="en-US" sz="2400" dirty="0">
+              <a:rPr lang="en-US" sz="2200" dirty="0">
                 <a:solidFill>
                   <a:srgbClr val="0000FF"/>
                 </a:solidFill>
@@ -22745,7 +22796,7 @@
               <a:t>false</a:t>
             </a:r>
             <a:r>
-              <a:rPr lang="en-US" sz="2400" dirty="0">
+              <a:rPr lang="en-US" sz="2200" dirty="0">
                 <a:solidFill>
                   <a:srgbClr val="000000"/>
                 </a:solidFill>
@@ -22757,7 +22808,7 @@
               <a:t>, </a:t>
             </a:r>
             <a:r>
-              <a:rPr lang="en-US" sz="2400" dirty="0">
+              <a:rPr lang="en-US" sz="2200" dirty="0">
                 <a:solidFill>
                   <a:srgbClr val="A31515"/>
                 </a:solidFill>
@@ -22769,7 +22820,7 @@
               <a:t>"Global</a:t>
             </a:r>
             <a:r>
-              <a:rPr lang="en-US" sz="2400" dirty="0">
+              <a:rPr lang="en-US" sz="2200" dirty="0">
                 <a:solidFill>
                   <a:srgbClr val="9E5B71"/>
                 </a:solidFill>
@@ -22781,7 +22832,7 @@
               <a:t>\\</a:t>
             </a:r>
             <a:r>
-              <a:rPr lang="en-US" sz="2400" dirty="0" err="1">
+              <a:rPr lang="en-US" sz="2200" dirty="0" err="1">
                 <a:solidFill>
                   <a:srgbClr val="A31515"/>
                 </a:solidFill>
@@ -22793,7 +22844,7 @@
               <a:t>MyAppMutex</a:t>
             </a:r>
             <a:r>
-              <a:rPr lang="en-US" sz="2400" dirty="0" smtClean="0">
+              <a:rPr lang="en-US" sz="2200" dirty="0" smtClean="0">
                 <a:solidFill>
                   <a:srgbClr val="A31515"/>
                 </a:solidFill>
@@ -22805,7 +22856,7 @@
               <a:t>"</a:t>
             </a:r>
             <a:r>
-              <a:rPr lang="en-US" sz="2400" dirty="0" smtClean="0">
+              <a:rPr lang="en-US" sz="2200" dirty="0" smtClean="0">
                 <a:solidFill>
                   <a:srgbClr val="000000"/>
                 </a:solidFill>
@@ -22817,7 +22868,7 @@
               <a:t>)) </a:t>
             </a:r>
             <a:r>
-              <a:rPr lang="ru-RU" sz="2400" dirty="0" smtClean="0">
+              <a:rPr lang="ru-RU" sz="2200" dirty="0" smtClean="0">
                 <a:solidFill>
                   <a:srgbClr val="000000"/>
                 </a:solidFill>
@@ -22828,7 +22879,7 @@
               </a:rPr>
               <a:t>{</a:t>
             </a:r>
-            <a:endParaRPr lang="ru-RU" sz="2400" dirty="0">
+            <a:endParaRPr lang="ru-RU" sz="2200" dirty="0">
               <a:solidFill>
                 <a:srgbClr val="000000"/>
               </a:solidFill>
@@ -22840,7 +22891,7 @@
           </a:p>
           <a:p>
             <a:r>
-              <a:rPr lang="ru-RU" sz="2400" dirty="0">
+              <a:rPr lang="ru-RU" sz="2200" dirty="0">
                 <a:solidFill>
                   <a:srgbClr val="000000"/>
                 </a:solidFill>
@@ -22852,7 +22903,7 @@
               <a:t>    </a:t>
             </a:r>
             <a:r>
-              <a:rPr lang="ru-RU" sz="2400" dirty="0">
+              <a:rPr lang="ru-RU" sz="2200" dirty="0">
                 <a:solidFill>
                   <a:srgbClr val="008000"/>
                 </a:solidFill>
@@ -22864,7 +22915,7 @@
               <a:t>// Пытаемся захватить </a:t>
             </a:r>
             <a:r>
-              <a:rPr lang="ru-RU" sz="2400" dirty="0" err="1">
+              <a:rPr lang="ru-RU" sz="2200" dirty="0" err="1">
                 <a:solidFill>
                   <a:srgbClr val="008000"/>
                 </a:solidFill>
@@ -22876,7 +22927,7 @@
               <a:t>мьютекс</a:t>
             </a:r>
             <a:r>
-              <a:rPr lang="ru-RU" sz="2400" dirty="0">
+              <a:rPr lang="ru-RU" sz="2200" dirty="0">
                 <a:solidFill>
                   <a:srgbClr val="008000"/>
                 </a:solidFill>
@@ -22887,7 +22938,7 @@
               </a:rPr>
               <a:t> (ждем 5 секунд)</a:t>
             </a:r>
-            <a:endParaRPr lang="ru-RU" sz="2400" dirty="0">
+            <a:endParaRPr lang="ru-RU" sz="2200" dirty="0">
               <a:solidFill>
                 <a:srgbClr val="000000"/>
               </a:solidFill>
@@ -22899,7 +22950,7 @@
           </a:p>
           <a:p>
             <a:r>
-              <a:rPr lang="en-US" sz="2400" dirty="0">
+              <a:rPr lang="en-US" sz="2200" dirty="0">
                 <a:solidFill>
                   <a:srgbClr val="000000"/>
                 </a:solidFill>
@@ -22911,7 +22962,7 @@
               <a:t>    </a:t>
             </a:r>
             <a:r>
-              <a:rPr lang="en-US" sz="2400" dirty="0">
+              <a:rPr lang="en-US" sz="2200" dirty="0">
                 <a:solidFill>
                   <a:srgbClr val="0000FF"/>
                 </a:solidFill>
@@ -22923,7 +22974,7 @@
               <a:t>if</a:t>
             </a:r>
             <a:r>
-              <a:rPr lang="en-US" sz="2400" dirty="0">
+              <a:rPr lang="en-US" sz="2200" dirty="0">
                 <a:solidFill>
                   <a:srgbClr val="000000"/>
                 </a:solidFill>
@@ -22935,7 +22986,7 @@
               <a:t> (!</a:t>
             </a:r>
             <a:r>
-              <a:rPr lang="en-US" sz="2400" dirty="0" err="1">
+              <a:rPr lang="en-US" sz="2200" dirty="0" err="1">
                 <a:solidFill>
                   <a:srgbClr val="000000"/>
                 </a:solidFill>
@@ -22947,7 +22998,7 @@
               <a:t>mutex.WaitOne</a:t>
             </a:r>
             <a:r>
-              <a:rPr lang="en-US" sz="2400" dirty="0">
+              <a:rPr lang="en-US" sz="2200" dirty="0">
                 <a:solidFill>
                   <a:srgbClr val="000000"/>
                 </a:solidFill>
@@ -22961,7 +23012,7 @@
           </a:p>
           <a:p>
             <a:r>
-              <a:rPr lang="ru-RU" sz="2400" dirty="0">
+              <a:rPr lang="ru-RU" sz="2200" dirty="0">
                 <a:solidFill>
                   <a:srgbClr val="000000"/>
                 </a:solidFill>
@@ -22975,7 +23026,7 @@
           </a:p>
           <a:p>
             <a:r>
-              <a:rPr lang="ru-RU" sz="2400" dirty="0">
+              <a:rPr lang="ru-RU" sz="2200" dirty="0">
                 <a:solidFill>
                   <a:srgbClr val="000000"/>
                 </a:solidFill>
@@ -22987,7 +23038,7 @@
               <a:t>        </a:t>
             </a:r>
             <a:r>
-              <a:rPr lang="ru-RU" sz="2400" dirty="0" err="1">
+              <a:rPr lang="ru-RU" sz="2200" dirty="0" err="1">
                 <a:solidFill>
                   <a:srgbClr val="2B91AF"/>
                 </a:solidFill>
@@ -22999,7 +23050,7 @@
               <a:t>Console</a:t>
             </a:r>
             <a:r>
-              <a:rPr lang="ru-RU" sz="2400" dirty="0" err="1">
+              <a:rPr lang="ru-RU" sz="2200" dirty="0" err="1">
                 <a:solidFill>
                   <a:srgbClr val="000000"/>
                 </a:solidFill>
@@ -23011,7 +23062,7 @@
               <a:t>.WriteLine</a:t>
             </a:r>
             <a:r>
-              <a:rPr lang="ru-RU" sz="2400" dirty="0">
+              <a:rPr lang="ru-RU" sz="2200" dirty="0">
                 <a:solidFill>
                   <a:srgbClr val="000000"/>
                 </a:solidFill>
@@ -23023,7 +23074,7 @@
               <a:t>(</a:t>
             </a:r>
             <a:r>
-              <a:rPr lang="ru-RU" sz="2400" dirty="0">
+              <a:rPr lang="ru-RU" sz="2200" dirty="0">
                 <a:solidFill>
                   <a:srgbClr val="A31515"/>
                 </a:solidFill>
@@ -23035,7 +23086,7 @@
               <a:t>"Другая копия приложения уже запущена!"</a:t>
             </a:r>
             <a:r>
-              <a:rPr lang="ru-RU" sz="2400" dirty="0">
+              <a:rPr lang="ru-RU" sz="2200" dirty="0">
                 <a:solidFill>
                   <a:srgbClr val="000000"/>
                 </a:solidFill>
@@ -23049,7 +23100,7 @@
           </a:p>
           <a:p>
             <a:r>
-              <a:rPr lang="en-US" sz="2400" dirty="0">
+              <a:rPr lang="en-US" sz="2200" dirty="0">
                 <a:solidFill>
                   <a:srgbClr val="000000"/>
                 </a:solidFill>
@@ -23061,7 +23112,7 @@
               <a:t>        </a:t>
             </a:r>
             <a:r>
-              <a:rPr lang="en-US" sz="2400" dirty="0">
+              <a:rPr lang="en-US" sz="2200" dirty="0">
                 <a:solidFill>
                   <a:srgbClr val="0000FF"/>
                 </a:solidFill>
@@ -23073,7 +23124,7 @@
               <a:t>return</a:t>
             </a:r>
             <a:r>
-              <a:rPr lang="en-US" sz="2400" dirty="0">
+              <a:rPr lang="en-US" sz="2200" dirty="0">
                 <a:solidFill>
                   <a:srgbClr val="000000"/>
                 </a:solidFill>
@@ -23087,7 +23138,7 @@
           </a:p>
           <a:p>
             <a:r>
-              <a:rPr lang="ru-RU" sz="2400" dirty="0">
+              <a:rPr lang="ru-RU" sz="2200" dirty="0">
                 <a:solidFill>
                   <a:srgbClr val="000000"/>
                 </a:solidFill>
@@ -23101,7 +23152,7 @@
           </a:p>
           <a:p>
             <a:r>
-              <a:rPr lang="en-US" sz="2400" dirty="0">
+              <a:rPr lang="en-US" sz="2200" dirty="0">
                 <a:solidFill>
                   <a:srgbClr val="000000"/>
                 </a:solidFill>
@@ -23113,7 +23164,7 @@
               <a:t>    </a:t>
             </a:r>
             <a:r>
-              <a:rPr lang="en-US" sz="2400" dirty="0" smtClean="0">
+              <a:rPr lang="en-US" sz="2200" dirty="0" smtClean="0">
                 <a:solidFill>
                   <a:srgbClr val="0000FF"/>
                 </a:solidFill>
@@ -23125,7 +23176,7 @@
               <a:t>try</a:t>
             </a:r>
             <a:r>
-              <a:rPr lang="en-US" sz="2400" dirty="0">
+              <a:rPr lang="en-US" sz="2200" dirty="0">
                 <a:solidFill>
                   <a:srgbClr val="000000"/>
                 </a:solidFill>
@@ -23137,7 +23188,7 @@
               <a:t> </a:t>
             </a:r>
             <a:r>
-              <a:rPr lang="ru-RU" sz="2400" dirty="0" smtClean="0">
+              <a:rPr lang="ru-RU" sz="2200" dirty="0" smtClean="0">
                 <a:solidFill>
                   <a:srgbClr val="000000"/>
                 </a:solidFill>
@@ -23148,7 +23199,7 @@
               </a:rPr>
               <a:t>{</a:t>
             </a:r>
-            <a:endParaRPr lang="ru-RU" sz="2400" dirty="0">
+            <a:endParaRPr lang="ru-RU" sz="2200" dirty="0">
               <a:solidFill>
                 <a:srgbClr val="000000"/>
               </a:solidFill>
@@ -23160,7 +23211,7 @@
           </a:p>
           <a:p>
             <a:r>
-              <a:rPr lang="en-US" sz="2400" dirty="0">
+              <a:rPr lang="en-US" sz="2200" dirty="0">
                 <a:solidFill>
                   <a:srgbClr val="000000"/>
                 </a:solidFill>
@@ -23172,7 +23223,7 @@
               <a:t>        </a:t>
             </a:r>
             <a:r>
-              <a:rPr lang="en-US" sz="2400" dirty="0" err="1">
+              <a:rPr lang="en-US" sz="2200" dirty="0" err="1">
                 <a:solidFill>
                   <a:srgbClr val="2B91AF"/>
                 </a:solidFill>
@@ -23184,7 +23235,7 @@
               <a:t>Console</a:t>
             </a:r>
             <a:r>
-              <a:rPr lang="en-US" sz="2400" dirty="0" err="1">
+              <a:rPr lang="en-US" sz="2200" dirty="0" err="1">
                 <a:solidFill>
                   <a:srgbClr val="000000"/>
                 </a:solidFill>
@@ -23196,7 +23247,7 @@
               <a:t>.WriteLine</a:t>
             </a:r>
             <a:r>
-              <a:rPr lang="en-US" sz="2400" dirty="0">
+              <a:rPr lang="en-US" sz="2200" dirty="0">
                 <a:solidFill>
                   <a:srgbClr val="000000"/>
                 </a:solidFill>
@@ -23208,7 +23259,7 @@
               <a:t>(</a:t>
             </a:r>
             <a:r>
-              <a:rPr lang="en-US" sz="2400" dirty="0">
+              <a:rPr lang="en-US" sz="2200" dirty="0">
                 <a:solidFill>
                   <a:srgbClr val="A31515"/>
                 </a:solidFill>
@@ -23220,7 +23271,7 @@
               <a:t>"</a:t>
             </a:r>
             <a:r>
-              <a:rPr lang="ru-RU" sz="2400" dirty="0">
+              <a:rPr lang="ru-RU" sz="2200" dirty="0">
                 <a:solidFill>
                   <a:srgbClr val="A31515"/>
                 </a:solidFill>
@@ -23232,7 +23283,7 @@
               <a:t>Приложение работает..."</a:t>
             </a:r>
             <a:r>
-              <a:rPr lang="ru-RU" sz="2400" dirty="0">
+              <a:rPr lang="ru-RU" sz="2200" dirty="0">
                 <a:solidFill>
                   <a:srgbClr val="000000"/>
                 </a:solidFill>
@@ -23246,7 +23297,7 @@
           </a:p>
           <a:p>
             <a:r>
-              <a:rPr lang="en-US" sz="2400" dirty="0">
+              <a:rPr lang="en-US" sz="2200" dirty="0">
                 <a:solidFill>
                   <a:srgbClr val="000000"/>
                 </a:solidFill>
@@ -23258,7 +23309,7 @@
               <a:t>        </a:t>
             </a:r>
             <a:r>
-              <a:rPr lang="en-US" sz="2400" dirty="0" err="1">
+              <a:rPr lang="en-US" sz="2200" dirty="0" err="1">
                 <a:solidFill>
                   <a:srgbClr val="2B91AF"/>
                 </a:solidFill>
@@ -23270,7 +23321,7 @@
               <a:t>Console</a:t>
             </a:r>
             <a:r>
-              <a:rPr lang="en-US" sz="2400" dirty="0" err="1">
+              <a:rPr lang="en-US" sz="2200" dirty="0" err="1">
                 <a:solidFill>
                   <a:srgbClr val="000000"/>
                 </a:solidFill>
@@ -23282,7 +23333,7 @@
               <a:t>.ReadLine</a:t>
             </a:r>
             <a:r>
-              <a:rPr lang="en-US" sz="2400" dirty="0">
+              <a:rPr lang="en-US" sz="2200" dirty="0">
                 <a:solidFill>
                   <a:srgbClr val="000000"/>
                 </a:solidFill>
@@ -23296,7 +23347,7 @@
           </a:p>
           <a:p>
             <a:r>
-              <a:rPr lang="ru-RU" sz="2400" dirty="0">
+              <a:rPr lang="ru-RU" sz="2200" dirty="0">
                 <a:solidFill>
                   <a:srgbClr val="000000"/>
                 </a:solidFill>
@@ -23310,7 +23361,7 @@
           </a:p>
           <a:p>
             <a:r>
-              <a:rPr lang="en-US" sz="2400" dirty="0">
+              <a:rPr lang="en-US" sz="2200" dirty="0">
                 <a:solidFill>
                   <a:srgbClr val="000000"/>
                 </a:solidFill>
@@ -23322,7 +23373,7 @@
               <a:t>    </a:t>
             </a:r>
             <a:r>
-              <a:rPr lang="en-US" sz="2400" dirty="0" smtClean="0">
+              <a:rPr lang="en-US" sz="2200" dirty="0" smtClean="0">
                 <a:solidFill>
                   <a:srgbClr val="0000FF"/>
                 </a:solidFill>
@@ -23334,7 +23385,7 @@
               <a:t>finally</a:t>
             </a:r>
             <a:r>
-              <a:rPr lang="en-US" sz="2400" dirty="0" smtClean="0">
+              <a:rPr lang="en-US" sz="2200" dirty="0" smtClean="0">
                 <a:solidFill>
                   <a:srgbClr val="000000"/>
                 </a:solidFill>
@@ -23348,7 +23399,7 @@
           </a:p>
           <a:p>
             <a:r>
-              <a:rPr lang="en-US" sz="2400" dirty="0" smtClean="0">
+              <a:rPr lang="en-US" sz="2200" dirty="0" smtClean="0">
                 <a:solidFill>
                   <a:srgbClr val="000000"/>
                 </a:solidFill>
@@ -23360,7 +23411,7 @@
               <a:t>        </a:t>
             </a:r>
             <a:r>
-              <a:rPr lang="en-US" sz="2400" dirty="0" err="1" smtClean="0">
+              <a:rPr lang="en-US" sz="2200" dirty="0" err="1" smtClean="0">
                 <a:solidFill>
                   <a:srgbClr val="000000"/>
                 </a:solidFill>
@@ -23372,7 +23423,7 @@
               <a:t>mutex.ReleaseMutex</a:t>
             </a:r>
             <a:r>
-              <a:rPr lang="en-US" sz="2400" dirty="0" smtClean="0">
+              <a:rPr lang="en-US" sz="2200" dirty="0" smtClean="0">
                 <a:solidFill>
                   <a:srgbClr val="000000"/>
                 </a:solidFill>
@@ -23386,7 +23437,7 @@
           </a:p>
           <a:p>
             <a:r>
-              <a:rPr lang="en-US" sz="2400" dirty="0" smtClean="0">
+              <a:rPr lang="en-US" sz="2200" dirty="0" smtClean="0">
                 <a:solidFill>
                   <a:srgbClr val="000000"/>
                 </a:solidFill>
@@ -23397,7 +23448,7 @@
               </a:rPr>
               <a:t>    }</a:t>
             </a:r>
-            <a:endParaRPr lang="ru-RU" sz="2400" dirty="0">
+            <a:endParaRPr lang="ru-RU" sz="2200" dirty="0">
               <a:solidFill>
                 <a:srgbClr val="000000"/>
               </a:solidFill>
@@ -23409,7 +23460,7 @@
           </a:p>
           <a:p>
             <a:r>
-              <a:rPr lang="ru-RU" sz="2400" dirty="0">
+              <a:rPr lang="ru-RU" sz="2200" dirty="0">
                 <a:solidFill>
                   <a:srgbClr val="000000"/>
                 </a:solidFill>
@@ -23420,7 +23471,7 @@
               </a:rPr>
               <a:t>}</a:t>
             </a:r>
-            <a:endParaRPr lang="en-US" sz="2400" dirty="0">
+            <a:endParaRPr lang="en-US" sz="2200" dirty="0">
               <a:solidFill>
                 <a:srgbClr val="000000"/>
               </a:solidFill>
@@ -23474,15 +23525,15 @@
         </p:nvSpPr>
         <p:spPr>
           <a:xfrm>
-            <a:off x="298450" y="654356"/>
-            <a:ext cx="11595100" cy="6186309"/>
+            <a:off x="0" y="654356"/>
+            <a:ext cx="12192000" cy="6186309"/>
           </a:xfrm>
           <a:prstGeom prst="rect">
             <a:avLst/>
           </a:prstGeom>
         </p:spPr>
         <p:txBody>
-          <a:bodyPr wrap="square">
+          <a:bodyPr wrap="square" lIns="360000" rIns="360000">
             <a:spAutoFit/>
           </a:bodyPr>
           <a:lstStyle/>
@@ -23957,28 +24008,28 @@
           <p:nvPr>
             <p:extLst>
               <p:ext uri="{D42A27DB-BD31-4B8C-83A1-F6EECF244321}">
-                <p14:modId xmlns:p14="http://schemas.microsoft.com/office/powerpoint/2010/main" val="3646084021"/>
+                <p14:modId xmlns:p14="http://schemas.microsoft.com/office/powerpoint/2010/main" val="2562486080"/>
               </p:ext>
             </p:extLst>
           </p:nvPr>
         </p:nvGraphicFramePr>
         <p:xfrm>
-          <a:off x="238125" y="333375"/>
-          <a:ext cx="11696700" cy="5394960"/>
+          <a:off x="444499" y="333375"/>
+          <a:ext cx="11328401" cy="5394960"/>
         </p:xfrm>
         <a:graphic>
           <a:graphicData uri="http://schemas.openxmlformats.org/drawingml/2006/table">
             <a:tbl>
               <a:tblPr/>
               <a:tblGrid>
-                <a:gridCol w="3629025">
+                <a:gridCol w="3514756">
                   <a:extLst>
                     <a:ext uri="{9D8B030D-6E8A-4147-A177-3AD203B41FA5}">
                       <a16:colId xmlns:a16="http://schemas.microsoft.com/office/drawing/2014/main" val="1316415174"/>
                     </a:ext>
                   </a:extLst>
                 </a:gridCol>
-                <a:gridCol w="8067675">
+                <a:gridCol w="7813645">
                   <a:extLst>
                     <a:ext uri="{9D8B030D-6E8A-4147-A177-3AD203B41FA5}">
                       <a16:colId xmlns:a16="http://schemas.microsoft.com/office/drawing/2014/main" val="263168893"/>
@@ -24375,20 +24426,27 @@
                         </a:lnSpc>
                       </a:pPr>
                       <a:r>
-                        <a:rPr lang="en-US" sz="2400" b="1">
+                        <a:rPr lang="en-US" sz="2400" b="1" dirty="0" err="1">
                           <a:effectLst/>
                           <a:latin typeface="Bookman Old Style" panose="02050604050505020204" pitchFamily="18" charset="0"/>
                         </a:rPr>
-                        <a:t>WaitOne(</a:t>
+                        <a:t>WaitOne</a:t>
                       </a:r>
                       <a:r>
-                        <a:rPr lang="ru-RU" sz="2400" b="1">
+                        <a:rPr lang="en-US" sz="2400" b="1" dirty="0">
+                          <a:effectLst/>
+                          <a:latin typeface="Bookman Old Style" panose="02050604050505020204" pitchFamily="18" charset="0"/>
+                        </a:rPr>
+                        <a:t>(</a:t>
+                      </a:r>
+                      <a:r>
+                        <a:rPr lang="ru-RU" sz="2400" b="1" dirty="0">
                           <a:effectLst/>
                           <a:latin typeface="Bookman Old Style" panose="02050604050505020204" pitchFamily="18" charset="0"/>
                         </a:rPr>
                         <a:t>таймаут)</a:t>
                       </a:r>
-                      <a:endParaRPr lang="ru-RU" sz="2400">
+                      <a:endParaRPr lang="ru-RU" sz="2400" dirty="0">
                         <a:effectLst/>
                         <a:latin typeface="Bookman Old Style" panose="02050604050505020204" pitchFamily="18" charset="0"/>
                       </a:endParaRPr>
@@ -24687,15 +24745,15 @@
         </p:nvSpPr>
         <p:spPr>
           <a:xfrm>
-            <a:off x="268942" y="654355"/>
-            <a:ext cx="11646834" cy="3970318"/>
+            <a:off x="0" y="654355"/>
+            <a:ext cx="12192000" cy="3970318"/>
           </a:xfrm>
           <a:prstGeom prst="rect">
             <a:avLst/>
           </a:prstGeom>
         </p:spPr>
         <p:txBody>
-          <a:bodyPr wrap="square">
+          <a:bodyPr wrap="square" lIns="360000" rIns="360000">
             <a:spAutoFit/>
           </a:bodyPr>
           <a:lstStyle/>
@@ -25473,15 +25531,15 @@
         </p:nvSpPr>
         <p:spPr>
           <a:xfrm>
-            <a:off x="193675" y="120956"/>
-            <a:ext cx="11595100" cy="6740307"/>
+            <a:off x="0" y="120956"/>
+            <a:ext cx="12192000" cy="6740307"/>
           </a:xfrm>
           <a:prstGeom prst="rect">
             <a:avLst/>
           </a:prstGeom>
         </p:spPr>
         <p:txBody>
-          <a:bodyPr wrap="square">
+          <a:bodyPr wrap="square" lIns="360000" rIns="360000">
             <a:spAutoFit/>
           </a:bodyPr>
           <a:lstStyle/>
@@ -26861,15 +26919,15 @@
         </p:nvSpPr>
         <p:spPr>
           <a:xfrm>
-            <a:off x="269875" y="161925"/>
-            <a:ext cx="11595100" cy="5632311"/>
+            <a:off x="0" y="161925"/>
+            <a:ext cx="12192000" cy="5632311"/>
           </a:xfrm>
           <a:prstGeom prst="rect">
             <a:avLst/>
           </a:prstGeom>
         </p:spPr>
         <p:txBody>
-          <a:bodyPr wrap="square">
+          <a:bodyPr wrap="square" lIns="360000" rIns="360000">
             <a:spAutoFit/>
           </a:bodyPr>
           <a:lstStyle/>
@@ -27259,15 +27317,15 @@
         </p:nvSpPr>
         <p:spPr>
           <a:xfrm>
-            <a:off x="200025" y="295275"/>
-            <a:ext cx="11677650" cy="3046988"/>
+            <a:off x="0" y="295275"/>
+            <a:ext cx="12192000" cy="3416320"/>
           </a:xfrm>
           <a:prstGeom prst="rect">
             <a:avLst/>
           </a:prstGeom>
         </p:spPr>
         <p:txBody>
-          <a:bodyPr wrap="square">
+          <a:bodyPr wrap="square" lIns="360000" rIns="360000">
             <a:spAutoFit/>
           </a:bodyPr>
           <a:lstStyle/>
@@ -27650,7 +27708,7 @@
         </p:blipFill>
         <p:spPr>
           <a:xfrm>
-            <a:off x="200025" y="3466982"/>
+            <a:off x="257175" y="3711595"/>
             <a:ext cx="11677650" cy="1411087"/>
           </a:xfrm>
           <a:prstGeom prst="rect">
@@ -27703,15 +27761,15 @@
         </p:nvSpPr>
         <p:spPr>
           <a:xfrm>
-            <a:off x="179307" y="85998"/>
-            <a:ext cx="11668126" cy="1754326"/>
+            <a:off x="0" y="85998"/>
+            <a:ext cx="12192000" cy="1754326"/>
           </a:xfrm>
           <a:prstGeom prst="rect">
             <a:avLst/>
           </a:prstGeom>
         </p:spPr>
         <p:txBody>
-          <a:bodyPr wrap="square">
+          <a:bodyPr wrap="square" lIns="360000" rIns="360000">
             <a:spAutoFit/>
           </a:bodyPr>
           <a:lstStyle/>
@@ -28336,22 +28394,22 @@
         </p:nvSpPr>
         <p:spPr>
           <a:xfrm>
-            <a:off x="123824" y="0"/>
-            <a:ext cx="12068175" cy="6677021"/>
+            <a:off x="0" y="0"/>
+            <a:ext cx="12191999" cy="6769354"/>
           </a:xfrm>
           <a:prstGeom prst="rect">
             <a:avLst/>
           </a:prstGeom>
         </p:spPr>
         <p:txBody>
-          <a:bodyPr wrap="square">
+          <a:bodyPr wrap="square" lIns="360000" rIns="360000">
             <a:spAutoFit/>
           </a:bodyPr>
           <a:lstStyle/>
           <a:p>
             <a:pPr algn="just">
               <a:lnSpc>
-                <a:spcPct val="150000"/>
+                <a:spcPct val="130000"/>
               </a:lnSpc>
             </a:pPr>
             <a:r>
@@ -28376,7 +28434,7 @@
           <a:p>
             <a:pPr algn="just">
               <a:lnSpc>
-                <a:spcPct val="150000"/>
+                <a:spcPct val="130000"/>
               </a:lnSpc>
             </a:pPr>
             <a:endParaRPr lang="en-US" sz="2400" dirty="0" smtClean="0">
@@ -28386,7 +28444,7 @@
           <a:p>
             <a:pPr algn="just">
               <a:lnSpc>
-                <a:spcPct val="150000"/>
+                <a:spcPct val="130000"/>
               </a:lnSpc>
             </a:pPr>
             <a:r>
@@ -28432,7 +28490,7 @@
           <a:p>
             <a:pPr algn="just">
               <a:lnSpc>
-                <a:spcPct val="150000"/>
+                <a:spcPct val="130000"/>
               </a:lnSpc>
             </a:pPr>
             <a:r>
@@ -28466,7 +28524,7 @@
           <a:p>
             <a:pPr algn="just">
               <a:lnSpc>
-                <a:spcPct val="150000"/>
+                <a:spcPct val="130000"/>
               </a:lnSpc>
             </a:pPr>
             <a:r>
@@ -28506,7 +28564,7 @@
           <a:p>
             <a:pPr algn="just">
               <a:lnSpc>
-                <a:spcPct val="150000"/>
+                <a:spcPct val="130000"/>
               </a:lnSpc>
             </a:pPr>
             <a:r>
@@ -28540,7 +28598,7 @@
           <a:p>
             <a:pPr algn="just">
               <a:lnSpc>
-                <a:spcPct val="150000"/>
+                <a:spcPct val="130000"/>
               </a:lnSpc>
             </a:pPr>
             <a:r>
@@ -28577,7 +28635,7 @@
           <a:p>
             <a:pPr marL="285750" indent="-285750" algn="just">
               <a:lnSpc>
-                <a:spcPct val="150000"/>
+                <a:spcPct val="130000"/>
               </a:lnSpc>
               <a:buFont typeface="Arial" panose="020B0604020202020204" pitchFamily="34" charset="0"/>
               <a:buChar char="•"/>
@@ -28598,7 +28656,7 @@
           <a:p>
             <a:pPr marL="285750" indent="-285750" algn="just">
               <a:lnSpc>
-                <a:spcPct val="150000"/>
+                <a:spcPct val="130000"/>
               </a:lnSpc>
               <a:buFont typeface="Arial" panose="020B0604020202020204" pitchFamily="34" charset="0"/>
               <a:buChar char="•"/>
@@ -28619,7 +28677,7 @@
           <a:p>
             <a:pPr marL="285750" indent="-285750" algn="just">
               <a:lnSpc>
-                <a:spcPct val="150000"/>
+                <a:spcPct val="130000"/>
               </a:lnSpc>
               <a:buFont typeface="Arial" panose="020B0604020202020204" pitchFamily="34" charset="0"/>
               <a:buChar char="•"/>
@@ -28652,7 +28710,7 @@
           <a:p>
             <a:pPr marL="285750" indent="-285750" algn="just">
               <a:lnSpc>
-                <a:spcPct val="150000"/>
+                <a:spcPct val="130000"/>
               </a:lnSpc>
               <a:buFont typeface="Arial" panose="020B0604020202020204" pitchFamily="34" charset="0"/>
               <a:buChar char="•"/>
@@ -28673,7 +28731,7 @@
           <a:p>
             <a:pPr marL="285750" indent="-285750" algn="just">
               <a:lnSpc>
-                <a:spcPct val="150000"/>
+                <a:spcPct val="130000"/>
               </a:lnSpc>
               <a:buFont typeface="Arial" panose="020B0604020202020204" pitchFamily="34" charset="0"/>
               <a:buChar char="•"/>
@@ -28742,23 +28800,19 @@
         <p:spPr>
           <a:xfrm>
             <a:off x="0" y="0"/>
-            <a:ext cx="12107333" cy="6740307"/>
+            <a:ext cx="12107333" cy="6201698"/>
           </a:xfrm>
           <a:prstGeom prst="rect">
             <a:avLst/>
           </a:prstGeom>
         </p:spPr>
         <p:txBody>
-          <a:bodyPr wrap="square">
+          <a:bodyPr wrap="square" lIns="360000" rIns="360000">
             <a:spAutoFit/>
           </a:bodyPr>
           <a:lstStyle/>
           <a:p>
-            <a:pPr algn="just">
-              <a:lnSpc>
-                <a:spcPct val="150000"/>
-              </a:lnSpc>
-            </a:pPr>
+            <a:pPr algn="just"/>
             <a:r>
               <a:rPr lang="ru-RU" sz="2400" dirty="0">
                 <a:latin typeface="Bookman Old Style" panose="02050604050505020204" pitchFamily="18" charset="0"/>
@@ -28827,7 +28881,7 @@
           </a:p>
           <a:p>
             <a:r>
-              <a:rPr lang="en-US" sz="2400" dirty="0" smtClean="0">
+              <a:rPr lang="en-US" sz="2300" dirty="0" smtClean="0">
                 <a:solidFill>
                   <a:srgbClr val="0000FF"/>
                 </a:solidFill>
@@ -28836,7 +28890,7 @@
               <a:t>using</a:t>
             </a:r>
             <a:r>
-              <a:rPr lang="en-US" sz="2400" dirty="0" smtClean="0">
+              <a:rPr lang="en-US" sz="2300" dirty="0" smtClean="0">
                 <a:solidFill>
                   <a:srgbClr val="000000"/>
                 </a:solidFill>
@@ -28845,7 +28899,7 @@
               <a:t> </a:t>
             </a:r>
             <a:r>
-              <a:rPr lang="en-US" sz="2400" dirty="0" err="1">
+              <a:rPr lang="en-US" sz="2300" dirty="0" err="1">
                 <a:solidFill>
                   <a:srgbClr val="000000"/>
                 </a:solidFill>
@@ -28854,7 +28908,7 @@
               <a:t>System.Threading</a:t>
             </a:r>
             <a:r>
-              <a:rPr lang="en-US" sz="2400" dirty="0" smtClean="0">
+              <a:rPr lang="en-US" sz="2300" dirty="0" smtClean="0">
                 <a:solidFill>
                   <a:srgbClr val="000000"/>
                 </a:solidFill>
@@ -28862,7 +28916,7 @@
               </a:rPr>
               <a:t>;</a:t>
             </a:r>
-            <a:endParaRPr lang="ru-RU" sz="2400" dirty="0">
+            <a:endParaRPr lang="ru-RU" sz="2300" dirty="0">
               <a:solidFill>
                 <a:srgbClr val="000000"/>
               </a:solidFill>
@@ -28871,7 +28925,7 @@
           </a:p>
           <a:p>
             <a:r>
-              <a:rPr lang="ru-RU" sz="2400" dirty="0">
+              <a:rPr lang="ru-RU" sz="2300" dirty="0">
                 <a:solidFill>
                   <a:srgbClr val="008000"/>
                 </a:solidFill>
@@ -28879,7 +28933,7 @@
               </a:rPr>
               <a:t>// получаем текущий поток</a:t>
             </a:r>
-            <a:endParaRPr lang="ru-RU" sz="2400" dirty="0">
+            <a:endParaRPr lang="ru-RU" sz="2300" dirty="0">
               <a:solidFill>
                 <a:srgbClr val="000000"/>
               </a:solidFill>
@@ -28888,7 +28942,7 @@
           </a:p>
           <a:p>
             <a:r>
-              <a:rPr lang="en-US" sz="2400" dirty="0">
+              <a:rPr lang="en-US" sz="2300" dirty="0">
                 <a:solidFill>
                   <a:srgbClr val="000000"/>
                 </a:solidFill>
@@ -28897,7 +28951,7 @@
               <a:t>Thread </a:t>
             </a:r>
             <a:r>
-              <a:rPr lang="en-US" sz="2400" dirty="0" err="1">
+              <a:rPr lang="en-US" sz="2300" dirty="0" err="1">
                 <a:solidFill>
                   <a:srgbClr val="000000"/>
                 </a:solidFill>
@@ -28906,7 +28960,7 @@
               <a:t>currentThread</a:t>
             </a:r>
             <a:r>
-              <a:rPr lang="en-US" sz="2400" dirty="0">
+              <a:rPr lang="en-US" sz="2300" dirty="0">
                 <a:solidFill>
                   <a:srgbClr val="000000"/>
                 </a:solidFill>
@@ -28915,7 +28969,7 @@
               <a:t> = </a:t>
             </a:r>
             <a:r>
-              <a:rPr lang="en-US" sz="2400" dirty="0" err="1">
+              <a:rPr lang="en-US" sz="2300" dirty="0" err="1">
                 <a:solidFill>
                   <a:srgbClr val="000000"/>
                 </a:solidFill>
@@ -28924,7 +28978,7 @@
               <a:t>Thread.CurrentThread</a:t>
             </a:r>
             <a:r>
-              <a:rPr lang="en-US" sz="2400" dirty="0" smtClean="0">
+              <a:rPr lang="en-US" sz="2300" dirty="0" smtClean="0">
                 <a:solidFill>
                   <a:srgbClr val="000000"/>
                 </a:solidFill>
@@ -28932,7 +28986,7 @@
               </a:rPr>
               <a:t>;</a:t>
             </a:r>
-            <a:endParaRPr lang="ru-RU" sz="2400" dirty="0">
+            <a:endParaRPr lang="ru-RU" sz="2300" dirty="0">
               <a:solidFill>
                 <a:srgbClr val="000000"/>
               </a:solidFill>
@@ -28941,7 +28995,7 @@
           </a:p>
           <a:p>
             <a:r>
-              <a:rPr lang="ru-RU" sz="2400" dirty="0">
+              <a:rPr lang="ru-RU" sz="2300" dirty="0">
                 <a:solidFill>
                   <a:srgbClr val="008000"/>
                 </a:solidFill>
@@ -28949,7 +29003,7 @@
               </a:rPr>
               <a:t>//получаем имя потока</a:t>
             </a:r>
-            <a:endParaRPr lang="ru-RU" sz="2400" dirty="0">
+            <a:endParaRPr lang="ru-RU" sz="2300" dirty="0">
               <a:solidFill>
                 <a:srgbClr val="000000"/>
               </a:solidFill>
@@ -28958,7 +29012,7 @@
           </a:p>
           <a:p>
             <a:r>
-              <a:rPr lang="en-US" sz="2400" dirty="0" err="1">
+              <a:rPr lang="en-US" sz="2300" dirty="0" err="1">
                 <a:solidFill>
                   <a:srgbClr val="000000"/>
                 </a:solidFill>
@@ -28967,7 +29021,7 @@
               <a:t>Console.WriteLine</a:t>
             </a:r>
             <a:r>
-              <a:rPr lang="en-US" sz="2400" dirty="0">
+              <a:rPr lang="en-US" sz="2300" dirty="0">
                 <a:solidFill>
                   <a:srgbClr val="000000"/>
                 </a:solidFill>
@@ -28976,7 +29030,7 @@
               <a:t>(</a:t>
             </a:r>
             <a:r>
-              <a:rPr lang="en-US" sz="2400" dirty="0">
+              <a:rPr lang="en-US" sz="2300" dirty="0">
                 <a:solidFill>
                   <a:srgbClr val="A31515"/>
                 </a:solidFill>
@@ -28985,7 +29039,7 @@
               <a:t>$"</a:t>
             </a:r>
             <a:r>
-              <a:rPr lang="ru-RU" sz="2400" dirty="0">
+              <a:rPr lang="ru-RU" sz="2300" dirty="0">
                 <a:solidFill>
                   <a:srgbClr val="A31515"/>
                 </a:solidFill>
@@ -28994,7 +29048,7 @@
               <a:t>Имя потока: </a:t>
             </a:r>
             <a:r>
-              <a:rPr lang="ru-RU" sz="2400" dirty="0">
+              <a:rPr lang="ru-RU" sz="2300" dirty="0">
                 <a:solidFill>
                   <a:srgbClr val="000000"/>
                 </a:solidFill>
@@ -29003,7 +29057,7 @@
               <a:t>{</a:t>
             </a:r>
             <a:r>
-              <a:rPr lang="en-US" sz="2400" dirty="0" err="1">
+              <a:rPr lang="en-US" sz="2300" dirty="0" err="1">
                 <a:solidFill>
                   <a:srgbClr val="000000"/>
                 </a:solidFill>
@@ -29012,7 +29066,7 @@
               <a:t>currentThread.Name</a:t>
             </a:r>
             <a:r>
-              <a:rPr lang="en-US" sz="2400" dirty="0">
+              <a:rPr lang="en-US" sz="2300" dirty="0">
                 <a:solidFill>
                   <a:srgbClr val="000000"/>
                 </a:solidFill>
@@ -29021,7 +29075,7 @@
               <a:t>}</a:t>
             </a:r>
             <a:r>
-              <a:rPr lang="en-US" sz="2400" dirty="0">
+              <a:rPr lang="en-US" sz="2300" dirty="0">
                 <a:solidFill>
                   <a:srgbClr val="A31515"/>
                 </a:solidFill>
@@ -29030,7 +29084,7 @@
               <a:t>"</a:t>
             </a:r>
             <a:r>
-              <a:rPr lang="en-US" sz="2400" dirty="0">
+              <a:rPr lang="en-US" sz="2300" dirty="0">
                 <a:solidFill>
                   <a:srgbClr val="000000"/>
                 </a:solidFill>
@@ -29041,7 +29095,7 @@
           </a:p>
           <a:p>
             <a:r>
-              <a:rPr lang="en-US" sz="2400" dirty="0" err="1">
+              <a:rPr lang="en-US" sz="2300" dirty="0" err="1">
                 <a:solidFill>
                   <a:srgbClr val="000000"/>
                 </a:solidFill>
@@ -29050,7 +29104,7 @@
               <a:t>currentThread.Name</a:t>
             </a:r>
             <a:r>
-              <a:rPr lang="en-US" sz="2400" dirty="0">
+              <a:rPr lang="en-US" sz="2300" dirty="0">
                 <a:solidFill>
                   <a:srgbClr val="000000"/>
                 </a:solidFill>
@@ -29059,7 +29113,7 @@
               <a:t> = </a:t>
             </a:r>
             <a:r>
-              <a:rPr lang="en-US" sz="2400" dirty="0">
+              <a:rPr lang="en-US" sz="2300" dirty="0">
                 <a:solidFill>
                   <a:srgbClr val="A31515"/>
                 </a:solidFill>
@@ -29068,7 +29122,7 @@
               <a:t>"</a:t>
             </a:r>
             <a:r>
-              <a:rPr lang="ru-RU" sz="2400" dirty="0">
+              <a:rPr lang="ru-RU" sz="2300" dirty="0">
                 <a:solidFill>
                   <a:srgbClr val="A31515"/>
                 </a:solidFill>
@@ -29077,7 +29131,7 @@
               <a:t>Метод </a:t>
             </a:r>
             <a:r>
-              <a:rPr lang="en-US" sz="2400" dirty="0">
+              <a:rPr lang="en-US" sz="2300" dirty="0">
                 <a:solidFill>
                   <a:srgbClr val="A31515"/>
                 </a:solidFill>
@@ -29086,7 +29140,7 @@
               <a:t>Main"</a:t>
             </a:r>
             <a:r>
-              <a:rPr lang="en-US" sz="2400" dirty="0">
+              <a:rPr lang="en-US" sz="2300" dirty="0">
                 <a:solidFill>
                   <a:srgbClr val="000000"/>
                 </a:solidFill>
@@ -29097,7 +29151,7 @@
           </a:p>
           <a:p>
             <a:r>
-              <a:rPr lang="en-US" sz="2400" dirty="0" err="1">
+              <a:rPr lang="en-US" sz="2300" dirty="0" err="1">
                 <a:solidFill>
                   <a:srgbClr val="000000"/>
                 </a:solidFill>
@@ -29106,7 +29160,7 @@
               <a:t>Console.WriteLine</a:t>
             </a:r>
             <a:r>
-              <a:rPr lang="en-US" sz="2400" dirty="0">
+              <a:rPr lang="en-US" sz="2300" dirty="0">
                 <a:solidFill>
                   <a:srgbClr val="000000"/>
                 </a:solidFill>
@@ -29115,7 +29169,7 @@
               <a:t>(</a:t>
             </a:r>
             <a:r>
-              <a:rPr lang="en-US" sz="2400" dirty="0">
+              <a:rPr lang="en-US" sz="2300" dirty="0">
                 <a:solidFill>
                   <a:srgbClr val="A31515"/>
                 </a:solidFill>
@@ -29124,7 +29178,7 @@
               <a:t>$"</a:t>
             </a:r>
             <a:r>
-              <a:rPr lang="ru-RU" sz="2400" dirty="0">
+              <a:rPr lang="ru-RU" sz="2300" dirty="0">
                 <a:solidFill>
                   <a:srgbClr val="A31515"/>
                 </a:solidFill>
@@ -29133,7 +29187,7 @@
               <a:t>Имя потока: </a:t>
             </a:r>
             <a:r>
-              <a:rPr lang="ru-RU" sz="2400" dirty="0">
+              <a:rPr lang="ru-RU" sz="2300" dirty="0">
                 <a:solidFill>
                   <a:srgbClr val="000000"/>
                 </a:solidFill>
@@ -29142,7 +29196,7 @@
               <a:t>{</a:t>
             </a:r>
             <a:r>
-              <a:rPr lang="en-US" sz="2400" dirty="0" err="1">
+              <a:rPr lang="en-US" sz="2300" dirty="0" err="1">
                 <a:solidFill>
                   <a:srgbClr val="000000"/>
                 </a:solidFill>
@@ -29151,7 +29205,7 @@
               <a:t>currentThread.Name</a:t>
             </a:r>
             <a:r>
-              <a:rPr lang="en-US" sz="2400" dirty="0" smtClean="0">
+              <a:rPr lang="en-US" sz="2300" dirty="0" smtClean="0">
                 <a:solidFill>
                   <a:srgbClr val="000000"/>
                 </a:solidFill>
@@ -29160,7 +29214,7 @@
               <a:t>}</a:t>
             </a:r>
             <a:r>
-              <a:rPr lang="en-US" sz="2400" dirty="0" smtClean="0">
+              <a:rPr lang="en-US" sz="2300" dirty="0" smtClean="0">
                 <a:solidFill>
                   <a:srgbClr val="A31515"/>
                 </a:solidFill>
@@ -29169,7 +29223,7 @@
               <a:t>"</a:t>
             </a:r>
             <a:r>
-              <a:rPr lang="en-US" sz="2400" dirty="0" smtClean="0">
+              <a:rPr lang="en-US" sz="2300" dirty="0" smtClean="0">
                 <a:solidFill>
                   <a:srgbClr val="000000"/>
                 </a:solidFill>
@@ -29177,7 +29231,7 @@
               </a:rPr>
               <a:t>);</a:t>
             </a:r>
-            <a:endParaRPr lang="ru-RU" sz="2400" dirty="0">
+            <a:endParaRPr lang="ru-RU" sz="2300" dirty="0">
               <a:solidFill>
                 <a:srgbClr val="000000"/>
               </a:solidFill>
@@ -29186,7 +29240,7 @@
           </a:p>
           <a:p>
             <a:r>
-              <a:rPr lang="en-US" sz="2400" dirty="0" err="1">
+              <a:rPr lang="en-US" sz="2300" dirty="0" err="1">
                 <a:solidFill>
                   <a:srgbClr val="000000"/>
                 </a:solidFill>
@@ -29195,7 +29249,7 @@
               <a:t>Console.WriteLine</a:t>
             </a:r>
             <a:r>
-              <a:rPr lang="en-US" sz="2400" dirty="0">
+              <a:rPr lang="en-US" sz="2300" dirty="0">
                 <a:solidFill>
                   <a:srgbClr val="000000"/>
                 </a:solidFill>
@@ -29204,7 +29258,7 @@
               <a:t>(</a:t>
             </a:r>
             <a:r>
-              <a:rPr lang="en-US" sz="2400" dirty="0">
+              <a:rPr lang="en-US" sz="2300" dirty="0">
                 <a:solidFill>
                   <a:srgbClr val="A31515"/>
                 </a:solidFill>
@@ -29213,7 +29267,7 @@
               <a:t>$"</a:t>
             </a:r>
             <a:r>
-              <a:rPr lang="ru-RU" sz="2400" dirty="0">
+              <a:rPr lang="ru-RU" sz="2300" dirty="0">
                 <a:solidFill>
                   <a:srgbClr val="A31515"/>
                 </a:solidFill>
@@ -29222,7 +29276,7 @@
               <a:t>Запущен ли поток: </a:t>
             </a:r>
             <a:r>
-              <a:rPr lang="ru-RU" sz="2400" dirty="0">
+              <a:rPr lang="ru-RU" sz="2300" dirty="0">
                 <a:solidFill>
                   <a:srgbClr val="000000"/>
                 </a:solidFill>
@@ -29231,7 +29285,7 @@
               <a:t>{</a:t>
             </a:r>
             <a:r>
-              <a:rPr lang="en-US" sz="2400" dirty="0" err="1">
+              <a:rPr lang="en-US" sz="2300" dirty="0" err="1">
                 <a:solidFill>
                   <a:srgbClr val="000000"/>
                 </a:solidFill>
@@ -29240,7 +29294,7 @@
               <a:t>currentThread.IsAlive</a:t>
             </a:r>
             <a:r>
-              <a:rPr lang="en-US" sz="2400" dirty="0">
+              <a:rPr lang="en-US" sz="2300" dirty="0">
                 <a:solidFill>
                   <a:srgbClr val="000000"/>
                 </a:solidFill>
@@ -29249,7 +29303,7 @@
               <a:t>}</a:t>
             </a:r>
             <a:r>
-              <a:rPr lang="en-US" sz="2400" dirty="0">
+              <a:rPr lang="en-US" sz="2300" dirty="0">
                 <a:solidFill>
                   <a:srgbClr val="A31515"/>
                 </a:solidFill>
@@ -29258,7 +29312,7 @@
               <a:t>"</a:t>
             </a:r>
             <a:r>
-              <a:rPr lang="en-US" sz="2400" dirty="0">
+              <a:rPr lang="en-US" sz="2300" dirty="0">
                 <a:solidFill>
                   <a:srgbClr val="000000"/>
                 </a:solidFill>
@@ -29269,7 +29323,7 @@
           </a:p>
           <a:p>
             <a:r>
-              <a:rPr lang="en-US" sz="2400" dirty="0" err="1">
+              <a:rPr lang="en-US" sz="2300" dirty="0" err="1">
                 <a:solidFill>
                   <a:srgbClr val="000000"/>
                 </a:solidFill>
@@ -29278,7 +29332,7 @@
               <a:t>Console.WriteLine</a:t>
             </a:r>
             <a:r>
-              <a:rPr lang="en-US" sz="2400" dirty="0">
+              <a:rPr lang="en-US" sz="2300" dirty="0">
                 <a:solidFill>
                   <a:srgbClr val="000000"/>
                 </a:solidFill>
@@ -29287,7 +29341,7 @@
               <a:t>(</a:t>
             </a:r>
             <a:r>
-              <a:rPr lang="en-US" sz="2400" dirty="0">
+              <a:rPr lang="en-US" sz="2300" dirty="0">
                 <a:solidFill>
                   <a:srgbClr val="A31515"/>
                 </a:solidFill>
@@ -29296,7 +29350,7 @@
               <a:t>$"Id </a:t>
             </a:r>
             <a:r>
-              <a:rPr lang="ru-RU" sz="2400" dirty="0">
+              <a:rPr lang="ru-RU" sz="2300" dirty="0">
                 <a:solidFill>
                   <a:srgbClr val="A31515"/>
                 </a:solidFill>
@@ -29305,7 +29359,7 @@
               <a:t>потока: </a:t>
             </a:r>
             <a:r>
-              <a:rPr lang="ru-RU" sz="2400" dirty="0">
+              <a:rPr lang="ru-RU" sz="2300" dirty="0">
                 <a:solidFill>
                   <a:srgbClr val="000000"/>
                 </a:solidFill>
@@ -29314,7 +29368,7 @@
               <a:t>{</a:t>
             </a:r>
             <a:r>
-              <a:rPr lang="en-US" sz="2400" dirty="0" err="1">
+              <a:rPr lang="en-US" sz="2300" dirty="0" err="1">
                 <a:solidFill>
                   <a:srgbClr val="000000"/>
                 </a:solidFill>
@@ -29323,7 +29377,7 @@
               <a:t>currentThread.ManagedThreadId</a:t>
             </a:r>
             <a:r>
-              <a:rPr lang="en-US" sz="2400" dirty="0">
+              <a:rPr lang="en-US" sz="2300" dirty="0">
                 <a:solidFill>
                   <a:srgbClr val="000000"/>
                 </a:solidFill>
@@ -29332,7 +29386,7 @@
               <a:t>}</a:t>
             </a:r>
             <a:r>
-              <a:rPr lang="en-US" sz="2400" dirty="0">
+              <a:rPr lang="en-US" sz="2300" dirty="0">
                 <a:solidFill>
                   <a:srgbClr val="A31515"/>
                 </a:solidFill>
@@ -29341,7 +29395,7 @@
               <a:t>"</a:t>
             </a:r>
             <a:r>
-              <a:rPr lang="en-US" sz="2400" dirty="0">
+              <a:rPr lang="en-US" sz="2300" dirty="0">
                 <a:solidFill>
                   <a:srgbClr val="000000"/>
                 </a:solidFill>
@@ -29352,7 +29406,7 @@
           </a:p>
           <a:p>
             <a:r>
-              <a:rPr lang="en-US" sz="2400" dirty="0" err="1">
+              <a:rPr lang="en-US" sz="2300" dirty="0" err="1">
                 <a:solidFill>
                   <a:srgbClr val="000000"/>
                 </a:solidFill>
@@ -29361,7 +29415,7 @@
               <a:t>Console.WriteLine</a:t>
             </a:r>
             <a:r>
-              <a:rPr lang="en-US" sz="2400" dirty="0">
+              <a:rPr lang="en-US" sz="2300" dirty="0">
                 <a:solidFill>
                   <a:srgbClr val="000000"/>
                 </a:solidFill>
@@ -29370,7 +29424,7 @@
               <a:t>(</a:t>
             </a:r>
             <a:r>
-              <a:rPr lang="en-US" sz="2400" dirty="0">
+              <a:rPr lang="en-US" sz="2300" dirty="0">
                 <a:solidFill>
                   <a:srgbClr val="A31515"/>
                 </a:solidFill>
@@ -29379,7 +29433,7 @@
               <a:t>$"</a:t>
             </a:r>
             <a:r>
-              <a:rPr lang="ru-RU" sz="2400" dirty="0">
+              <a:rPr lang="ru-RU" sz="2300" dirty="0">
                 <a:solidFill>
                   <a:srgbClr val="A31515"/>
                 </a:solidFill>
@@ -29388,7 +29442,7 @@
               <a:t>Приоритет потока: </a:t>
             </a:r>
             <a:r>
-              <a:rPr lang="ru-RU" sz="2400" dirty="0">
+              <a:rPr lang="ru-RU" sz="2300" dirty="0">
                 <a:solidFill>
                   <a:srgbClr val="000000"/>
                 </a:solidFill>
@@ -29397,7 +29451,7 @@
               <a:t>{</a:t>
             </a:r>
             <a:r>
-              <a:rPr lang="en-US" sz="2400" dirty="0" err="1">
+              <a:rPr lang="en-US" sz="2300" dirty="0" err="1">
                 <a:solidFill>
                   <a:srgbClr val="000000"/>
                 </a:solidFill>
@@ -29406,7 +29460,7 @@
               <a:t>currentThread.Priority</a:t>
             </a:r>
             <a:r>
-              <a:rPr lang="en-US" sz="2400" dirty="0">
+              <a:rPr lang="en-US" sz="2300" dirty="0">
                 <a:solidFill>
                   <a:srgbClr val="000000"/>
                 </a:solidFill>
@@ -29415,7 +29469,7 @@
               <a:t>}</a:t>
             </a:r>
             <a:r>
-              <a:rPr lang="en-US" sz="2400" dirty="0">
+              <a:rPr lang="en-US" sz="2300" dirty="0">
                 <a:solidFill>
                   <a:srgbClr val="A31515"/>
                 </a:solidFill>
@@ -29424,7 +29478,7 @@
               <a:t>"</a:t>
             </a:r>
             <a:r>
-              <a:rPr lang="en-US" sz="2400" dirty="0">
+              <a:rPr lang="en-US" sz="2300" dirty="0">
                 <a:solidFill>
                   <a:srgbClr val="000000"/>
                 </a:solidFill>
@@ -29435,7 +29489,7 @@
           </a:p>
           <a:p>
             <a:r>
-              <a:rPr lang="en-US" sz="2400" dirty="0" err="1">
+              <a:rPr lang="en-US" sz="2300" dirty="0" err="1">
                 <a:solidFill>
                   <a:srgbClr val="000000"/>
                 </a:solidFill>
@@ -29444,7 +29498,7 @@
               <a:t>Console.WriteLine</a:t>
             </a:r>
             <a:r>
-              <a:rPr lang="en-US" sz="2400" dirty="0">
+              <a:rPr lang="en-US" sz="2300" dirty="0">
                 <a:solidFill>
                   <a:srgbClr val="000000"/>
                 </a:solidFill>
@@ -29453,7 +29507,7 @@
               <a:t>(</a:t>
             </a:r>
             <a:r>
-              <a:rPr lang="en-US" sz="2400" dirty="0">
+              <a:rPr lang="en-US" sz="2300" dirty="0">
                 <a:solidFill>
                   <a:srgbClr val="A31515"/>
                 </a:solidFill>
@@ -29462,7 +29516,7 @@
               <a:t>$"</a:t>
             </a:r>
             <a:r>
-              <a:rPr lang="ru-RU" sz="2400" dirty="0">
+              <a:rPr lang="ru-RU" sz="2300" dirty="0">
                 <a:solidFill>
                   <a:srgbClr val="A31515"/>
                 </a:solidFill>
@@ -29471,7 +29525,7 @@
               <a:t>Статус потока: </a:t>
             </a:r>
             <a:r>
-              <a:rPr lang="ru-RU" sz="2400" dirty="0">
+              <a:rPr lang="ru-RU" sz="2300" dirty="0">
                 <a:solidFill>
                   <a:srgbClr val="000000"/>
                 </a:solidFill>
@@ -29480,7 +29534,7 @@
               <a:t>{</a:t>
             </a:r>
             <a:r>
-              <a:rPr lang="en-US" sz="2400" dirty="0" err="1">
+              <a:rPr lang="en-US" sz="2300" dirty="0" err="1">
                 <a:solidFill>
                   <a:srgbClr val="000000"/>
                 </a:solidFill>
@@ -29489,7 +29543,7 @@
               <a:t>currentThread.ThreadState</a:t>
             </a:r>
             <a:r>
-              <a:rPr lang="en-US" sz="2400" dirty="0">
+              <a:rPr lang="en-US" sz="2300" dirty="0">
                 <a:solidFill>
                   <a:srgbClr val="000000"/>
                 </a:solidFill>
@@ -29498,7 +29552,7 @@
               <a:t>}</a:t>
             </a:r>
             <a:r>
-              <a:rPr lang="en-US" sz="2400" dirty="0">
+              <a:rPr lang="en-US" sz="2300" dirty="0">
                 <a:solidFill>
                   <a:srgbClr val="A31515"/>
                 </a:solidFill>
@@ -29507,7 +29561,7 @@
               <a:t>"</a:t>
             </a:r>
             <a:r>
-              <a:rPr lang="en-US" sz="2400" dirty="0">
+              <a:rPr lang="en-US" sz="2300" dirty="0">
                 <a:solidFill>
                   <a:srgbClr val="000000"/>
                 </a:solidFill>
@@ -29515,7 +29569,7 @@
               </a:rPr>
               <a:t>);</a:t>
             </a:r>
-            <a:endParaRPr lang="ru-RU" sz="2400" dirty="0">
+            <a:endParaRPr lang="ru-RU" sz="2300" dirty="0">
               <a:latin typeface="Bookman Old Style" panose="02050604050505020204" pitchFamily="18" charset="0"/>
             </a:endParaRPr>
           </a:p>
@@ -29537,8 +29591,8 @@
         </p:blipFill>
         <p:spPr>
           <a:xfrm>
-            <a:off x="6724957" y="657043"/>
-            <a:ext cx="5382376" cy="2610214"/>
+            <a:off x="6333066" y="491943"/>
+            <a:ext cx="5218326" cy="2530657"/>
           </a:xfrm>
           <a:prstGeom prst="rect">
             <a:avLst/>
@@ -29590,15 +29644,15 @@
         </p:nvSpPr>
         <p:spPr>
           <a:xfrm>
-            <a:off x="84667" y="110496"/>
-            <a:ext cx="12107333" cy="5078313"/>
+            <a:off x="1" y="110496"/>
+            <a:ext cx="12192000" cy="5078313"/>
           </a:xfrm>
           <a:prstGeom prst="rect">
             <a:avLst/>
           </a:prstGeom>
         </p:spPr>
         <p:txBody>
-          <a:bodyPr wrap="square">
+          <a:bodyPr wrap="square" lIns="360000" rIns="360000">
             <a:spAutoFit/>
           </a:bodyPr>
           <a:lstStyle/>
